--- a/sports-econ/downloads/chapter-2-the-supply-and-demand-playbook.pptx
+++ b/sports-econ/downloads/chapter-2-the-supply-and-demand-playbook.pptx
@@ -2,31 +2,31 @@
 <file path=ppt/presentation.xml><?xml version="1.0" encoding="utf-8"?>
 <p:presentation xmlns:p="http://schemas.openxmlformats.org/presentationml/2006/main">
   <p:sldMasterIdLst>
-    <p:sldMasterId xmlns:r="http://schemas.openxmlformats.org/officeDocument/2006/relationships" id="2147483648" r:id="R1bed5b42e51c4a0a"/>
+    <p:sldMasterId xmlns:r="http://schemas.openxmlformats.org/officeDocument/2006/relationships" id="2147483648" r:id="R8752ee95b98a4f7b"/>
   </p:sldMasterIdLst>
   <p:notesMasterIdLst>
-    <p:notesMasterId xmlns:r="http://schemas.openxmlformats.org/officeDocument/2006/relationships" r:id="Re73d7bc680014a51"/>
+    <p:notesMasterId xmlns:r="http://schemas.openxmlformats.org/officeDocument/2006/relationships" r:id="R736e5bf1ffeb4d12"/>
   </p:notesMasterIdLst>
   <p:sldIdLst>
-    <p:sldId xmlns:r="http://schemas.openxmlformats.org/officeDocument/2006/relationships" id="256" r:id="Ref77cd7c2e004734"/>
-    <p:sldId xmlns:r="http://schemas.openxmlformats.org/officeDocument/2006/relationships" id="257" r:id="R1b1aa7d004c841a8"/>
-    <p:sldId xmlns:r="http://schemas.openxmlformats.org/officeDocument/2006/relationships" id="258" r:id="R96be06b5ad9e4359"/>
-    <p:sldId xmlns:r="http://schemas.openxmlformats.org/officeDocument/2006/relationships" id="259" r:id="Rceba76e7c3a14cc7"/>
-    <p:sldId xmlns:r="http://schemas.openxmlformats.org/officeDocument/2006/relationships" id="260" r:id="Rbf332cbfd4484200"/>
-    <p:sldId xmlns:r="http://schemas.openxmlformats.org/officeDocument/2006/relationships" id="261" r:id="R927b4eb871094286"/>
-    <p:sldId xmlns:r="http://schemas.openxmlformats.org/officeDocument/2006/relationships" id="262" r:id="Rf9273ddfc48847c1"/>
-    <p:sldId xmlns:r="http://schemas.openxmlformats.org/officeDocument/2006/relationships" id="263" r:id="Rc6c2a47f8b2f42b4"/>
-    <p:sldId xmlns:r="http://schemas.openxmlformats.org/officeDocument/2006/relationships" id="264" r:id="Rc7c301bfd27443ee"/>
-    <p:sldId xmlns:r="http://schemas.openxmlformats.org/officeDocument/2006/relationships" id="265" r:id="R35b8ef4680564b5c"/>
-    <p:sldId xmlns:r="http://schemas.openxmlformats.org/officeDocument/2006/relationships" id="266" r:id="R5e79eaae22cf4990"/>
-    <p:sldId xmlns:r="http://schemas.openxmlformats.org/officeDocument/2006/relationships" id="267" r:id="R4cece0a550664299"/>
-    <p:sldId xmlns:r="http://schemas.openxmlformats.org/officeDocument/2006/relationships" id="268" r:id="R8c127a03f5454da6"/>
-    <p:sldId xmlns:r="http://schemas.openxmlformats.org/officeDocument/2006/relationships" id="269" r:id="Re2ff5bfb88d5467b"/>
-    <p:sldId xmlns:r="http://schemas.openxmlformats.org/officeDocument/2006/relationships" id="270" r:id="R1aaf0f9e8e5d4e27"/>
-    <p:sldId xmlns:r="http://schemas.openxmlformats.org/officeDocument/2006/relationships" id="271" r:id="Rf7380c692b144167"/>
-    <p:sldId xmlns:r="http://schemas.openxmlformats.org/officeDocument/2006/relationships" id="272" r:id="Rb082c1ef194d4d33"/>
-    <p:sldId xmlns:r="http://schemas.openxmlformats.org/officeDocument/2006/relationships" id="273" r:id="R1c5b711cd4234079"/>
-    <p:sldId xmlns:r="http://schemas.openxmlformats.org/officeDocument/2006/relationships" id="274" r:id="R24265f1b33214c7c"/>
+    <p:sldId xmlns:r="http://schemas.openxmlformats.org/officeDocument/2006/relationships" id="256" r:id="Ra93fb614b01a4b2b"/>
+    <p:sldId xmlns:r="http://schemas.openxmlformats.org/officeDocument/2006/relationships" id="257" r:id="R27c24a2cce554c4e"/>
+    <p:sldId xmlns:r="http://schemas.openxmlformats.org/officeDocument/2006/relationships" id="258" r:id="R81ab207dad5d4b91"/>
+    <p:sldId xmlns:r="http://schemas.openxmlformats.org/officeDocument/2006/relationships" id="259" r:id="R8e012f3fccfe4bed"/>
+    <p:sldId xmlns:r="http://schemas.openxmlformats.org/officeDocument/2006/relationships" id="260" r:id="Rbc82143294cb4839"/>
+    <p:sldId xmlns:r="http://schemas.openxmlformats.org/officeDocument/2006/relationships" id="261" r:id="Rd5e36c9d67604c59"/>
+    <p:sldId xmlns:r="http://schemas.openxmlformats.org/officeDocument/2006/relationships" id="262" r:id="Rc4ccf08f13f74994"/>
+    <p:sldId xmlns:r="http://schemas.openxmlformats.org/officeDocument/2006/relationships" id="263" r:id="R7ead8fcfd9524145"/>
+    <p:sldId xmlns:r="http://schemas.openxmlformats.org/officeDocument/2006/relationships" id="264" r:id="R2d1d6e82fd5744c7"/>
+    <p:sldId xmlns:r="http://schemas.openxmlformats.org/officeDocument/2006/relationships" id="265" r:id="R26e0853d366b4089"/>
+    <p:sldId xmlns:r="http://schemas.openxmlformats.org/officeDocument/2006/relationships" id="266" r:id="R568caeb7eff64da4"/>
+    <p:sldId xmlns:r="http://schemas.openxmlformats.org/officeDocument/2006/relationships" id="267" r:id="R320c5ded5b454226"/>
+    <p:sldId xmlns:r="http://schemas.openxmlformats.org/officeDocument/2006/relationships" id="268" r:id="Rf7c6f1828ed941d9"/>
+    <p:sldId xmlns:r="http://schemas.openxmlformats.org/officeDocument/2006/relationships" id="269" r:id="R47bdec06b1304658"/>
+    <p:sldId xmlns:r="http://schemas.openxmlformats.org/officeDocument/2006/relationships" id="270" r:id="R75640052108d482a"/>
+    <p:sldId xmlns:r="http://schemas.openxmlformats.org/officeDocument/2006/relationships" id="271" r:id="Rbef2e080a01542a3"/>
+    <p:sldId xmlns:r="http://schemas.openxmlformats.org/officeDocument/2006/relationships" id="272" r:id="R155d9c52ce704eff"/>
+    <p:sldId xmlns:r="http://schemas.openxmlformats.org/officeDocument/2006/relationships" id="273" r:id="Rf76d427803854461"/>
+    <p:sldId xmlns:r="http://schemas.openxmlformats.org/officeDocument/2006/relationships" id="274" r:id="Raa99ad132cad47bc"/>
   </p:sldIdLst>
   <p:sldSz cx="12192000" cy="6858000"/>
   <p:notesSz cx="6858000" cy="9144000"/>
@@ -2193,7 +2193,7 @@
   </p:cSld>
   <p:clrMap bg1="lt1" tx1="dk1" bg2="lt2" tx2="dk2" accent1="accent1" accent2="accent2" accent3="accent3" accent4="accent4" accent5="accent5" accent6="accent6" hlink="hlink" folHlink="folHlink"/>
   <p:sldLayoutIdLst>
-    <p:sldLayoutId xmlns:r="http://schemas.openxmlformats.org/officeDocument/2006/relationships" id="2147483649" r:id="R0801488d19d94964"/>
+    <p:sldLayoutId xmlns:r="http://schemas.openxmlformats.org/officeDocument/2006/relationships" id="2147483649" r:id="R5a1f6f69d0b94611"/>
   </p:sldLayoutIdLst>
   <p:txStyles>
     <p:titleStyle>
@@ -2744,7 +2744,7 @@
           <p:cNvPr id="6" name="deck-supertitle">
             <a:extLst xmlns:a="http://schemas.openxmlformats.org/drawingml/2006/main">
               <a:ext uri="{FF2B5EF4-FFF2-40B4-BE49-F238E27FC236}">
-                <a16:creationId xmlns:a16="http://schemas.microsoft.com/office/drawing/2014/main" id="{E41D9BBB-891E-440D-963F-16484F68D3CC}"/>
+                <a16:creationId xmlns:a16="http://schemas.microsoft.com/office/drawing/2014/main" id="{559B9AA3-4D4C-426A-81CF-B09B9829A19B}"/>
               </a:ext>
             </a:extLst>
           </p:cNvPr>
@@ -2806,7 +2806,7 @@
           <p:cNvPr id="2" name="deck-title">
             <a:extLst xmlns:a="http://schemas.openxmlformats.org/drawingml/2006/main">
               <a:ext uri="{FF2B5EF4-FFF2-40B4-BE49-F238E27FC236}">
-                <a16:creationId xmlns:a16="http://schemas.microsoft.com/office/drawing/2014/main" id="{8B1486D8-05F1-46F4-AC6E-09B8CF637DD7}"/>
+                <a16:creationId xmlns:a16="http://schemas.microsoft.com/office/drawing/2014/main" id="{421DD16B-BBD4-4381-B103-9E020BEDE4B2}"/>
               </a:ext>
             </a:extLst>
           </p:cNvPr>
@@ -2868,7 +2868,7 @@
           <p:cNvPr id="3" name="deck-subtitle">
             <a:extLst xmlns:a="http://schemas.openxmlformats.org/drawingml/2006/main">
               <a:ext uri="{FF2B5EF4-FFF2-40B4-BE49-F238E27FC236}">
-                <a16:creationId xmlns:a16="http://schemas.microsoft.com/office/drawing/2014/main" id="{C7C0BC62-8D4B-4564-BE1B-ED24DAF745F0}"/>
+                <a16:creationId xmlns:a16="http://schemas.microsoft.com/office/drawing/2014/main" id="{BE060271-4DD7-4E6E-8100-DBDE6A1E0EA7}"/>
               </a:ext>
             </a:extLst>
           </p:cNvPr>
@@ -2930,7 +2930,7 @@
           <p:cNvPr id="4" name="title-field">
             <a:extLst xmlns:a="http://schemas.openxmlformats.org/drawingml/2006/main">
               <a:ext uri="{FF2B5EF4-FFF2-40B4-BE49-F238E27FC236}">
-                <a16:creationId xmlns:a16="http://schemas.microsoft.com/office/drawing/2014/main" id="{031C910A-CCEC-4781-B48E-C5E304C4711D}"/>
+                <a16:creationId xmlns:a16="http://schemas.microsoft.com/office/drawing/2014/main" id="{5CFC464A-26A7-447E-9532-232BF95158B3}"/>
               </a:ext>
             </a:extLst>
           </p:cNvPr>
@@ -2961,7 +2961,7 @@
           <p:cNvPr id="5" name="deck-number">
             <a:extLst xmlns:a="http://schemas.openxmlformats.org/drawingml/2006/main">
               <a:ext uri="{FF2B5EF4-FFF2-40B4-BE49-F238E27FC236}">
-                <a16:creationId xmlns:a16="http://schemas.microsoft.com/office/drawing/2014/main" id="{D87F60A8-5A50-4775-8A0F-4A6F5FB790FA}"/>
+                <a16:creationId xmlns:a16="http://schemas.microsoft.com/office/drawing/2014/main" id="{86789468-3AFB-4289-8AC9-417C3502D8AF}"/>
               </a:ext>
             </a:extLst>
           </p:cNvPr>
@@ -3021,7 +3021,7 @@
     </p:spTree>
     <p:extLst>
       <p:ext uri="{BB962C8B-B14F-4D97-AF65-F5344CB8AC3E}">
-        <p14:creationId xmlns:p14="http://schemas.microsoft.com/office/powerpoint/2010/main" val="1229096434"/>
+        <p14:creationId xmlns:p14="http://schemas.microsoft.com/office/powerpoint/2010/main" val="1245838415"/>
       </p:ext>
     </p:extLst>
   </p:cSld>
@@ -3052,7 +3052,7 @@
           <p:cNvPr id="27" name="chapter-label">
             <a:extLst xmlns:a="http://schemas.openxmlformats.org/drawingml/2006/main">
               <a:ext uri="{FF2B5EF4-FFF2-40B4-BE49-F238E27FC236}">
-                <a16:creationId xmlns:a16="http://schemas.microsoft.com/office/drawing/2014/main" id="{8BA6FA59-CB4B-4BB3-A887-29220646FD51}"/>
+                <a16:creationId xmlns:a16="http://schemas.microsoft.com/office/drawing/2014/main" id="{99CC289F-EF3E-4337-89DF-21FCCEF7108C}"/>
               </a:ext>
             </a:extLst>
           </p:cNvPr>
@@ -3114,7 +3114,7 @@
           <p:cNvPr id="2" name="slide-title">
             <a:extLst xmlns:a="http://schemas.openxmlformats.org/drawingml/2006/main">
               <a:ext uri="{FF2B5EF4-FFF2-40B4-BE49-F238E27FC236}">
-                <a16:creationId xmlns:a16="http://schemas.microsoft.com/office/drawing/2014/main" id="{C352BAFF-31F6-4CAB-A305-92BFF2364A01}"/>
+                <a16:creationId xmlns:a16="http://schemas.microsoft.com/office/drawing/2014/main" id="{F2F37557-DD07-4533-BB23-BBF6555E049F}"/>
               </a:ext>
             </a:extLst>
           </p:cNvPr>
@@ -3176,7 +3176,7 @@
           <p:cNvPr id="3" name="footer-rule">
             <a:extLst xmlns:a="http://schemas.openxmlformats.org/drawingml/2006/main">
               <a:ext uri="{FF2B5EF4-FFF2-40B4-BE49-F238E27FC236}">
-                <a16:creationId xmlns:a16="http://schemas.microsoft.com/office/drawing/2014/main" id="{ED51F692-886A-4BC8-9450-B973D2B2E8C0}"/>
+                <a16:creationId xmlns:a16="http://schemas.microsoft.com/office/drawing/2014/main" id="{63362747-BB35-4C07-9D52-65B649E076E4}"/>
               </a:ext>
             </a:extLst>
           </p:cNvPr>
@@ -3207,7 +3207,7 @@
           <p:cNvPr id="4" name="footer-book">
             <a:extLst xmlns:a="http://schemas.openxmlformats.org/drawingml/2006/main">
               <a:ext uri="{FF2B5EF4-FFF2-40B4-BE49-F238E27FC236}">
-                <a16:creationId xmlns:a16="http://schemas.microsoft.com/office/drawing/2014/main" id="{583B80E9-6FC2-4704-A68F-0825F0F48763}"/>
+                <a16:creationId xmlns:a16="http://schemas.microsoft.com/office/drawing/2014/main" id="{FC1BD2D1-5177-4DF1-B151-09167F268D50}"/>
               </a:ext>
             </a:extLst>
           </p:cNvPr>
@@ -3269,7 +3269,7 @@
           <p:cNvPr id="5" name="footer-number">
             <a:extLst xmlns:a="http://schemas.openxmlformats.org/drawingml/2006/main">
               <a:ext uri="{FF2B5EF4-FFF2-40B4-BE49-F238E27FC236}">
-                <a16:creationId xmlns:a16="http://schemas.microsoft.com/office/drawing/2014/main" id="{43C89A91-2E58-4090-8CFB-2C0578857B62}"/>
+                <a16:creationId xmlns:a16="http://schemas.microsoft.com/office/drawing/2014/main" id="{269952DD-BE59-499B-8B18-D2E7C5ECC1BD}"/>
               </a:ext>
             </a:extLst>
           </p:cNvPr>
@@ -3331,7 +3331,7 @@
           <p:cNvPr id="6" name="">
             <a:extLst xmlns:a="http://schemas.openxmlformats.org/drawingml/2006/main">
               <a:ext uri="{FF2B5EF4-FFF2-40B4-BE49-F238E27FC236}">
-                <a16:creationId xmlns:a16="http://schemas.microsoft.com/office/drawing/2014/main" id="{46D26516-DCCA-4735-90CE-DCD6F39B3216}"/>
+                <a16:creationId xmlns:a16="http://schemas.microsoft.com/office/drawing/2014/main" id="{00C3A30C-DE0A-432F-953F-B118B90C5BC7}"/>
               </a:ext>
             </a:extLst>
           </p:cNvPr>
@@ -3393,7 +3393,7 @@
           <p:cNvPr id="7" name="step-rule-1">
             <a:extLst xmlns:a="http://schemas.openxmlformats.org/drawingml/2006/main">
               <a:ext uri="{FF2B5EF4-FFF2-40B4-BE49-F238E27FC236}">
-                <a16:creationId xmlns:a16="http://schemas.microsoft.com/office/drawing/2014/main" id="{4F16BB36-73DC-4F8E-9525-3911D66E702D}"/>
+                <a16:creationId xmlns:a16="http://schemas.microsoft.com/office/drawing/2014/main" id="{F53AF53E-E638-4B30-894D-05DFA8A98932}"/>
               </a:ext>
             </a:extLst>
           </p:cNvPr>
@@ -3424,7 +3424,7 @@
           <p:cNvPr id="8" name="">
             <a:extLst xmlns:a="http://schemas.openxmlformats.org/drawingml/2006/main">
               <a:ext uri="{FF2B5EF4-FFF2-40B4-BE49-F238E27FC236}">
-                <a16:creationId xmlns:a16="http://schemas.microsoft.com/office/drawing/2014/main" id="{97410B9E-CC57-43CB-B676-F193819EBAF1}"/>
+                <a16:creationId xmlns:a16="http://schemas.microsoft.com/office/drawing/2014/main" id="{A0B0231A-4259-407E-AD16-11CCC5CE31A0}"/>
               </a:ext>
             </a:extLst>
           </p:cNvPr>
@@ -3486,7 +3486,7 @@
           <p:cNvPr id="9" name="">
             <a:extLst xmlns:a="http://schemas.openxmlformats.org/drawingml/2006/main">
               <a:ext uri="{FF2B5EF4-FFF2-40B4-BE49-F238E27FC236}">
-                <a16:creationId xmlns:a16="http://schemas.microsoft.com/office/drawing/2014/main" id="{47EFAC45-694F-4AD3-94A2-70D9E49F1BE1}"/>
+                <a16:creationId xmlns:a16="http://schemas.microsoft.com/office/drawing/2014/main" id="{752C8D66-4EA9-42DE-9B48-D921F5DB1CA0}"/>
               </a:ext>
             </a:extLst>
           </p:cNvPr>
@@ -3548,7 +3548,7 @@
           <p:cNvPr id="10" name="">
             <a:extLst xmlns:a="http://schemas.openxmlformats.org/drawingml/2006/main">
               <a:ext uri="{FF2B5EF4-FFF2-40B4-BE49-F238E27FC236}">
-                <a16:creationId xmlns:a16="http://schemas.microsoft.com/office/drawing/2014/main" id="{8DD168FC-AF10-4894-BC00-0BF089793807}"/>
+                <a16:creationId xmlns:a16="http://schemas.microsoft.com/office/drawing/2014/main" id="{9BC06A0F-A6B2-4C42-AD26-FD68AC5A9606}"/>
               </a:ext>
             </a:extLst>
           </p:cNvPr>
@@ -3610,7 +3610,7 @@
           <p:cNvPr id="11" name="step-rule-2">
             <a:extLst xmlns:a="http://schemas.openxmlformats.org/drawingml/2006/main">
               <a:ext uri="{FF2B5EF4-FFF2-40B4-BE49-F238E27FC236}">
-                <a16:creationId xmlns:a16="http://schemas.microsoft.com/office/drawing/2014/main" id="{018A5035-AA28-473C-B8D6-31595739FCE4}"/>
+                <a16:creationId xmlns:a16="http://schemas.microsoft.com/office/drawing/2014/main" id="{0E23F6C3-6978-436A-8387-F9C5FA49C05C}"/>
               </a:ext>
             </a:extLst>
           </p:cNvPr>
@@ -3641,7 +3641,7 @@
           <p:cNvPr id="12" name="">
             <a:extLst xmlns:a="http://schemas.openxmlformats.org/drawingml/2006/main">
               <a:ext uri="{FF2B5EF4-FFF2-40B4-BE49-F238E27FC236}">
-                <a16:creationId xmlns:a16="http://schemas.microsoft.com/office/drawing/2014/main" id="{9E0959F3-0718-45D6-AC34-17FE5EE0DF32}"/>
+                <a16:creationId xmlns:a16="http://schemas.microsoft.com/office/drawing/2014/main" id="{1F930374-405E-4A82-A694-37F42CA770DA}"/>
               </a:ext>
             </a:extLst>
           </p:cNvPr>
@@ -3703,7 +3703,7 @@
           <p:cNvPr id="13" name="">
             <a:extLst xmlns:a="http://schemas.openxmlformats.org/drawingml/2006/main">
               <a:ext uri="{FF2B5EF4-FFF2-40B4-BE49-F238E27FC236}">
-                <a16:creationId xmlns:a16="http://schemas.microsoft.com/office/drawing/2014/main" id="{5AF02343-DB34-4AF2-BAF8-2EEF6854F28B}"/>
+                <a16:creationId xmlns:a16="http://schemas.microsoft.com/office/drawing/2014/main" id="{EA2BAC4D-36A8-4BDE-BDEE-7D3C0782C9DC}"/>
               </a:ext>
             </a:extLst>
           </p:cNvPr>
@@ -3765,7 +3765,7 @@
           <p:cNvPr id="14" name="">
             <a:extLst xmlns:a="http://schemas.openxmlformats.org/drawingml/2006/main">
               <a:ext uri="{FF2B5EF4-FFF2-40B4-BE49-F238E27FC236}">
-                <a16:creationId xmlns:a16="http://schemas.microsoft.com/office/drawing/2014/main" id="{EC1FB395-C10B-4BA6-BDD7-A4CEF8D142FD}"/>
+                <a16:creationId xmlns:a16="http://schemas.microsoft.com/office/drawing/2014/main" id="{111668C6-E7D5-4661-8B4E-9A8FBD9DEDAA}"/>
               </a:ext>
             </a:extLst>
           </p:cNvPr>
@@ -3827,7 +3827,7 @@
           <p:cNvPr id="15" name="step-rule-3">
             <a:extLst xmlns:a="http://schemas.openxmlformats.org/drawingml/2006/main">
               <a:ext uri="{FF2B5EF4-FFF2-40B4-BE49-F238E27FC236}">
-                <a16:creationId xmlns:a16="http://schemas.microsoft.com/office/drawing/2014/main" id="{03CC4C08-DB63-4258-85BA-83E38EAB9779}"/>
+                <a16:creationId xmlns:a16="http://schemas.microsoft.com/office/drawing/2014/main" id="{24EEE08E-596E-47BA-A5A9-1273073255B8}"/>
               </a:ext>
             </a:extLst>
           </p:cNvPr>
@@ -3858,7 +3858,7 @@
           <p:cNvPr id="16" name="">
             <a:extLst xmlns:a="http://schemas.openxmlformats.org/drawingml/2006/main">
               <a:ext uri="{FF2B5EF4-FFF2-40B4-BE49-F238E27FC236}">
-                <a16:creationId xmlns:a16="http://schemas.microsoft.com/office/drawing/2014/main" id="{0964777C-15EB-4BDF-A222-14C422606F38}"/>
+                <a16:creationId xmlns:a16="http://schemas.microsoft.com/office/drawing/2014/main" id="{9DCACA33-74F9-4A98-BE30-ED7B6D4E6C73}"/>
               </a:ext>
             </a:extLst>
           </p:cNvPr>
@@ -3920,7 +3920,7 @@
           <p:cNvPr id="17" name="">
             <a:extLst xmlns:a="http://schemas.openxmlformats.org/drawingml/2006/main">
               <a:ext uri="{FF2B5EF4-FFF2-40B4-BE49-F238E27FC236}">
-                <a16:creationId xmlns:a16="http://schemas.microsoft.com/office/drawing/2014/main" id="{0839B41B-C235-4367-81F2-037B8545A77A}"/>
+                <a16:creationId xmlns:a16="http://schemas.microsoft.com/office/drawing/2014/main" id="{B4B06BC0-02CB-4EDD-8AA6-2A43759A990A}"/>
               </a:ext>
             </a:extLst>
           </p:cNvPr>
@@ -3982,7 +3982,7 @@
           <p:cNvPr id="18" name="">
             <a:extLst xmlns:a="http://schemas.openxmlformats.org/drawingml/2006/main">
               <a:ext uri="{FF2B5EF4-FFF2-40B4-BE49-F238E27FC236}">
-                <a16:creationId xmlns:a16="http://schemas.microsoft.com/office/drawing/2014/main" id="{34FE0F81-1F8D-4F94-A46E-CEAFAC23560D}"/>
+                <a16:creationId xmlns:a16="http://schemas.microsoft.com/office/drawing/2014/main" id="{ACF90425-9C0C-4D6D-8CFB-A5F1DE7CC522}"/>
               </a:ext>
             </a:extLst>
           </p:cNvPr>
@@ -4044,7 +4044,7 @@
           <p:cNvPr id="19" name="step-rule-4">
             <a:extLst xmlns:a="http://schemas.openxmlformats.org/drawingml/2006/main">
               <a:ext uri="{FF2B5EF4-FFF2-40B4-BE49-F238E27FC236}">
-                <a16:creationId xmlns:a16="http://schemas.microsoft.com/office/drawing/2014/main" id="{9A8954A1-4C56-4EA9-A777-BAC72A07416A}"/>
+                <a16:creationId xmlns:a16="http://schemas.microsoft.com/office/drawing/2014/main" id="{C3AC5FD6-1E7D-4C6B-827F-58E7D49039FD}"/>
               </a:ext>
             </a:extLst>
           </p:cNvPr>
@@ -4075,7 +4075,7 @@
           <p:cNvPr id="20" name="">
             <a:extLst xmlns:a="http://schemas.openxmlformats.org/drawingml/2006/main">
               <a:ext uri="{FF2B5EF4-FFF2-40B4-BE49-F238E27FC236}">
-                <a16:creationId xmlns:a16="http://schemas.microsoft.com/office/drawing/2014/main" id="{F3FCB94E-4E3E-4439-8C74-A4886E543BEC}"/>
+                <a16:creationId xmlns:a16="http://schemas.microsoft.com/office/drawing/2014/main" id="{89C08594-9E10-4082-B064-B9540C3938A2}"/>
               </a:ext>
             </a:extLst>
           </p:cNvPr>
@@ -4137,7 +4137,7 @@
           <p:cNvPr id="21" name="">
             <a:extLst xmlns:a="http://schemas.openxmlformats.org/drawingml/2006/main">
               <a:ext uri="{FF2B5EF4-FFF2-40B4-BE49-F238E27FC236}">
-                <a16:creationId xmlns:a16="http://schemas.microsoft.com/office/drawing/2014/main" id="{7D0BC0A9-2052-454D-8AE9-27A2B22F0B7F}"/>
+                <a16:creationId xmlns:a16="http://schemas.microsoft.com/office/drawing/2014/main" id="{CD9D2AFA-FFBE-4CED-9EBB-E8ABC9945B72}"/>
               </a:ext>
             </a:extLst>
           </p:cNvPr>
@@ -4199,7 +4199,7 @@
           <p:cNvPr id="22" name="">
             <a:extLst xmlns:a="http://schemas.openxmlformats.org/drawingml/2006/main">
               <a:ext uri="{FF2B5EF4-FFF2-40B4-BE49-F238E27FC236}">
-                <a16:creationId xmlns:a16="http://schemas.microsoft.com/office/drawing/2014/main" id="{F6D4314E-C539-4925-A054-7FB055D4E5C3}"/>
+                <a16:creationId xmlns:a16="http://schemas.microsoft.com/office/drawing/2014/main" id="{E5B42E64-EE58-4F37-9599-61C5AF26DACE}"/>
               </a:ext>
             </a:extLst>
           </p:cNvPr>
@@ -4261,7 +4261,7 @@
           <p:cNvPr id="23" name="step-rule-5">
             <a:extLst xmlns:a="http://schemas.openxmlformats.org/drawingml/2006/main">
               <a:ext uri="{FF2B5EF4-FFF2-40B4-BE49-F238E27FC236}">
-                <a16:creationId xmlns:a16="http://schemas.microsoft.com/office/drawing/2014/main" id="{8471935E-815C-4036-8F79-3A2FD68D3AE2}"/>
+                <a16:creationId xmlns:a16="http://schemas.microsoft.com/office/drawing/2014/main" id="{25A4499F-0530-47A1-AA6B-DE42F264C136}"/>
               </a:ext>
             </a:extLst>
           </p:cNvPr>
@@ -4292,7 +4292,7 @@
           <p:cNvPr id="24" name="">
             <a:extLst xmlns:a="http://schemas.openxmlformats.org/drawingml/2006/main">
               <a:ext uri="{FF2B5EF4-FFF2-40B4-BE49-F238E27FC236}">
-                <a16:creationId xmlns:a16="http://schemas.microsoft.com/office/drawing/2014/main" id="{C44B136A-4D4C-414F-9979-B72A863DC3CD}"/>
+                <a16:creationId xmlns:a16="http://schemas.microsoft.com/office/drawing/2014/main" id="{15874244-4DD6-4A3A-8007-A60527C3066A}"/>
               </a:ext>
             </a:extLst>
           </p:cNvPr>
@@ -4354,7 +4354,7 @@
           <p:cNvPr id="25" name="">
             <a:extLst xmlns:a="http://schemas.openxmlformats.org/drawingml/2006/main">
               <a:ext uri="{FF2B5EF4-FFF2-40B4-BE49-F238E27FC236}">
-                <a16:creationId xmlns:a16="http://schemas.microsoft.com/office/drawing/2014/main" id="{315E6285-D4E8-49A5-A6F9-EC284F7DA81E}"/>
+                <a16:creationId xmlns:a16="http://schemas.microsoft.com/office/drawing/2014/main" id="{D48B5619-D106-4F37-BB8C-28871B1CB011}"/>
               </a:ext>
             </a:extLst>
           </p:cNvPr>
@@ -4416,7 +4416,7 @@
           <p:cNvPr id="26" name="">
             <a:extLst xmlns:a="http://schemas.openxmlformats.org/drawingml/2006/main">
               <a:ext uri="{FF2B5EF4-FFF2-40B4-BE49-F238E27FC236}">
-                <a16:creationId xmlns:a16="http://schemas.microsoft.com/office/drawing/2014/main" id="{C1134363-8068-40B6-B0FE-CA396D8C1E79}"/>
+                <a16:creationId xmlns:a16="http://schemas.microsoft.com/office/drawing/2014/main" id="{9CE12E32-3244-4CBC-96D4-E6D3AA0497F0}"/>
               </a:ext>
             </a:extLst>
           </p:cNvPr>
@@ -4476,7 +4476,7 @@
     </p:spTree>
     <p:extLst>
       <p:ext uri="{BB962C8B-B14F-4D97-AF65-F5344CB8AC3E}">
-        <p14:creationId xmlns:p14="http://schemas.microsoft.com/office/powerpoint/2010/main" val="1783839377"/>
+        <p14:creationId xmlns:p14="http://schemas.microsoft.com/office/powerpoint/2010/main" val="1808309332"/>
       </p:ext>
     </p:extLst>
   </p:cSld>
@@ -4507,7 +4507,7 @@
           <p:cNvPr id="8" name="chapter-label">
             <a:extLst xmlns:a="http://schemas.openxmlformats.org/drawingml/2006/main">
               <a:ext uri="{FF2B5EF4-FFF2-40B4-BE49-F238E27FC236}">
-                <a16:creationId xmlns:a16="http://schemas.microsoft.com/office/drawing/2014/main" id="{D51B2329-E5C4-4DF5-B833-BC9550708245}"/>
+                <a16:creationId xmlns:a16="http://schemas.microsoft.com/office/drawing/2014/main" id="{2C469759-E08C-42E4-BE57-193E530CF70C}"/>
               </a:ext>
             </a:extLst>
           </p:cNvPr>
@@ -4569,7 +4569,7 @@
           <p:cNvPr id="2" name="slide-title">
             <a:extLst xmlns:a="http://schemas.openxmlformats.org/drawingml/2006/main">
               <a:ext uri="{FF2B5EF4-FFF2-40B4-BE49-F238E27FC236}">
-                <a16:creationId xmlns:a16="http://schemas.microsoft.com/office/drawing/2014/main" id="{623F51C9-BF13-458F-849A-84D693081C85}"/>
+                <a16:creationId xmlns:a16="http://schemas.microsoft.com/office/drawing/2014/main" id="{D07ADCED-6B90-414F-B181-A971A7BB7C39}"/>
               </a:ext>
             </a:extLst>
           </p:cNvPr>
@@ -4631,7 +4631,7 @@
           <p:cNvPr id="3" name="footer-rule">
             <a:extLst xmlns:a="http://schemas.openxmlformats.org/drawingml/2006/main">
               <a:ext uri="{FF2B5EF4-FFF2-40B4-BE49-F238E27FC236}">
-                <a16:creationId xmlns:a16="http://schemas.microsoft.com/office/drawing/2014/main" id="{405F42CC-39A9-4560-8821-B4C4C355F606}"/>
+                <a16:creationId xmlns:a16="http://schemas.microsoft.com/office/drawing/2014/main" id="{99D74D05-F0D0-447A-A2FA-1E70BE763DF5}"/>
               </a:ext>
             </a:extLst>
           </p:cNvPr>
@@ -4662,7 +4662,7 @@
           <p:cNvPr id="4" name="footer-book">
             <a:extLst xmlns:a="http://schemas.openxmlformats.org/drawingml/2006/main">
               <a:ext uri="{FF2B5EF4-FFF2-40B4-BE49-F238E27FC236}">
-                <a16:creationId xmlns:a16="http://schemas.microsoft.com/office/drawing/2014/main" id="{C4B70896-B3D3-4B41-9727-5AEF12234F64}"/>
+                <a16:creationId xmlns:a16="http://schemas.microsoft.com/office/drawing/2014/main" id="{D96371DB-F455-477B-805A-5D6F88751533}"/>
               </a:ext>
             </a:extLst>
           </p:cNvPr>
@@ -4724,7 +4724,7 @@
           <p:cNvPr id="5" name="footer-number">
             <a:extLst xmlns:a="http://schemas.openxmlformats.org/drawingml/2006/main">
               <a:ext uri="{FF2B5EF4-FFF2-40B4-BE49-F238E27FC236}">
-                <a16:creationId xmlns:a16="http://schemas.microsoft.com/office/drawing/2014/main" id="{42B36C67-9E1F-407E-BCC2-499B61ADAB0A}"/>
+                <a16:creationId xmlns:a16="http://schemas.microsoft.com/office/drawing/2014/main" id="{F49F63FC-7D0A-4982-82C9-48F40DEC2425}"/>
               </a:ext>
             </a:extLst>
           </p:cNvPr>
@@ -4790,7 +4790,7 @@
           <p:nvPr/>
         </p:nvPicPr>
         <p:blipFill>
-          <a:blip xmlns:r="http://schemas.openxmlformats.org/officeDocument/2006/relationships" xmlns:a="http://schemas.openxmlformats.org/drawingml/2006/main" r:embed="Re768b21a46594d14"/>
+          <a:blip xmlns:r="http://schemas.openxmlformats.org/officeDocument/2006/relationships" xmlns:a="http://schemas.openxmlformats.org/drawingml/2006/main" r:embed="R0e85c0858827406b"/>
           <a:stretch xmlns:a="http://schemas.openxmlformats.org/drawingml/2006/main"/>
         </p:blipFill>
         <p:spPr>
@@ -4808,7 +4808,7 @@
           <p:cNvPr id="7" name="">
             <a:extLst xmlns:a="http://schemas.openxmlformats.org/drawingml/2006/main">
               <a:ext uri="{FF2B5EF4-FFF2-40B4-BE49-F238E27FC236}">
-                <a16:creationId xmlns:a16="http://schemas.microsoft.com/office/drawing/2014/main" id="{275FDDC2-59B8-4C0F-B61B-A694B6488503}"/>
+                <a16:creationId xmlns:a16="http://schemas.microsoft.com/office/drawing/2014/main" id="{09C7F84C-FAE9-4D8C-B155-286FA61AF61C}"/>
               </a:ext>
             </a:extLst>
           </p:cNvPr>
@@ -4868,7 +4868,7 @@
     </p:spTree>
     <p:extLst>
       <p:ext uri="{BB962C8B-B14F-4D97-AF65-F5344CB8AC3E}">
-        <p14:creationId xmlns:p14="http://schemas.microsoft.com/office/powerpoint/2010/main" val="885880876"/>
+        <p14:creationId xmlns:p14="http://schemas.microsoft.com/office/powerpoint/2010/main" val="1899193077"/>
       </p:ext>
     </p:extLst>
   </p:cSld>
@@ -4899,7 +4899,7 @@
           <p:cNvPr id="10" name="">
             <a:extLst xmlns:a="http://schemas.openxmlformats.org/drawingml/2006/main">
               <a:ext uri="{FF2B5EF4-FFF2-40B4-BE49-F238E27FC236}">
-                <a16:creationId xmlns:a16="http://schemas.microsoft.com/office/drawing/2014/main" id="{6F42CCF4-CAC9-4CE7-946E-9D3FA25A3EC1}"/>
+                <a16:creationId xmlns:a16="http://schemas.microsoft.com/office/drawing/2014/main" id="{A4D1163F-5606-47BA-AA79-9D662F5C9103}"/>
               </a:ext>
             </a:extLst>
           </p:cNvPr>
@@ -4961,7 +4961,7 @@
           <p:cNvPr id="2" name="">
             <a:extLst xmlns:a="http://schemas.openxmlformats.org/drawingml/2006/main">
               <a:ext uri="{FF2B5EF4-FFF2-40B4-BE49-F238E27FC236}">
-                <a16:creationId xmlns:a16="http://schemas.microsoft.com/office/drawing/2014/main" id="{421404B0-D584-4C4F-A991-ADCBE2951F1A}"/>
+                <a16:creationId xmlns:a16="http://schemas.microsoft.com/office/drawing/2014/main" id="{CB0959F5-B9AE-48E8-8BC2-F4D07B075908}"/>
               </a:ext>
             </a:extLst>
           </p:cNvPr>
@@ -5023,7 +5023,7 @@
           <p:cNvPr id="3" name="big-statement">
             <a:extLst xmlns:a="http://schemas.openxmlformats.org/drawingml/2006/main">
               <a:ext uri="{FF2B5EF4-FFF2-40B4-BE49-F238E27FC236}">
-                <a16:creationId xmlns:a16="http://schemas.microsoft.com/office/drawing/2014/main" id="{1BB30285-43EF-4C62-A5D0-FBE2AC30D43B}"/>
+                <a16:creationId xmlns:a16="http://schemas.microsoft.com/office/drawing/2014/main" id="{A8228DD8-28ED-4508-BF0A-00B52AC62A59}"/>
               </a:ext>
             </a:extLst>
           </p:cNvPr>
@@ -5085,7 +5085,7 @@
           <p:cNvPr id="4" name="bullet-mark-1">
             <a:extLst xmlns:a="http://schemas.openxmlformats.org/drawingml/2006/main">
               <a:ext uri="{FF2B5EF4-FFF2-40B4-BE49-F238E27FC236}">
-                <a16:creationId xmlns:a16="http://schemas.microsoft.com/office/drawing/2014/main" id="{15F5C90C-6207-4C46-BF61-91E18C30EE59}"/>
+                <a16:creationId xmlns:a16="http://schemas.microsoft.com/office/drawing/2014/main" id="{8B3637A7-7CCC-4A5F-8AE0-1D547DF73D86}"/>
               </a:ext>
             </a:extLst>
           </p:cNvPr>
@@ -5147,7 +5147,7 @@
           <p:cNvPr id="5" name="bullet-1">
             <a:extLst xmlns:a="http://schemas.openxmlformats.org/drawingml/2006/main">
               <a:ext uri="{FF2B5EF4-FFF2-40B4-BE49-F238E27FC236}">
-                <a16:creationId xmlns:a16="http://schemas.microsoft.com/office/drawing/2014/main" id="{8941A448-DED9-42C8-9592-14D775D070FA}"/>
+                <a16:creationId xmlns:a16="http://schemas.microsoft.com/office/drawing/2014/main" id="{CE78E34B-99D9-4797-BBE4-7874E891F870}"/>
               </a:ext>
             </a:extLst>
           </p:cNvPr>
@@ -5209,7 +5209,7 @@
           <p:cNvPr id="6" name="bullet-mark-2">
             <a:extLst xmlns:a="http://schemas.openxmlformats.org/drawingml/2006/main">
               <a:ext uri="{FF2B5EF4-FFF2-40B4-BE49-F238E27FC236}">
-                <a16:creationId xmlns:a16="http://schemas.microsoft.com/office/drawing/2014/main" id="{66A9D8DA-3B69-41CD-A03A-F66EE6856693}"/>
+                <a16:creationId xmlns:a16="http://schemas.microsoft.com/office/drawing/2014/main" id="{754E12FE-CAD4-4845-B943-C9092A227C8C}"/>
               </a:ext>
             </a:extLst>
           </p:cNvPr>
@@ -5271,7 +5271,7 @@
           <p:cNvPr id="7" name="bullet-2">
             <a:extLst xmlns:a="http://schemas.openxmlformats.org/drawingml/2006/main">
               <a:ext uri="{FF2B5EF4-FFF2-40B4-BE49-F238E27FC236}">
-                <a16:creationId xmlns:a16="http://schemas.microsoft.com/office/drawing/2014/main" id="{4F05AACC-653D-4D1D-A93C-2A4AD41979BD}"/>
+                <a16:creationId xmlns:a16="http://schemas.microsoft.com/office/drawing/2014/main" id="{B104422F-9166-4B2B-9011-560A7B925FFC}"/>
               </a:ext>
             </a:extLst>
           </p:cNvPr>
@@ -5333,7 +5333,7 @@
           <p:cNvPr id="8" name="bullet-mark-3">
             <a:extLst xmlns:a="http://schemas.openxmlformats.org/drawingml/2006/main">
               <a:ext uri="{FF2B5EF4-FFF2-40B4-BE49-F238E27FC236}">
-                <a16:creationId xmlns:a16="http://schemas.microsoft.com/office/drawing/2014/main" id="{B2A2C71F-0631-4DF3-A314-51BD3B5C4098}"/>
+                <a16:creationId xmlns:a16="http://schemas.microsoft.com/office/drawing/2014/main" id="{DCA7CF56-695D-499A-B23A-55C54D9B2573}"/>
               </a:ext>
             </a:extLst>
           </p:cNvPr>
@@ -5395,7 +5395,7 @@
           <p:cNvPr id="9" name="bullet-3">
             <a:extLst xmlns:a="http://schemas.openxmlformats.org/drawingml/2006/main">
               <a:ext uri="{FF2B5EF4-FFF2-40B4-BE49-F238E27FC236}">
-                <a16:creationId xmlns:a16="http://schemas.microsoft.com/office/drawing/2014/main" id="{94E5E30F-9EDE-475E-8C5B-EB6B204F4D83}"/>
+                <a16:creationId xmlns:a16="http://schemas.microsoft.com/office/drawing/2014/main" id="{12C2E630-3A54-4103-AE75-5D71DE169EC4}"/>
               </a:ext>
             </a:extLst>
           </p:cNvPr>
@@ -5455,7 +5455,7 @@
     </p:spTree>
     <p:extLst>
       <p:ext uri="{BB962C8B-B14F-4D97-AF65-F5344CB8AC3E}">
-        <p14:creationId xmlns:p14="http://schemas.microsoft.com/office/powerpoint/2010/main" val="745702885"/>
+        <p14:creationId xmlns:p14="http://schemas.microsoft.com/office/powerpoint/2010/main" val="1195790266"/>
       </p:ext>
     </p:extLst>
   </p:cSld>
@@ -5486,7 +5486,7 @@
           <p:cNvPr id="15" name="chapter-label">
             <a:extLst xmlns:a="http://schemas.openxmlformats.org/drawingml/2006/main">
               <a:ext uri="{FF2B5EF4-FFF2-40B4-BE49-F238E27FC236}">
-                <a16:creationId xmlns:a16="http://schemas.microsoft.com/office/drawing/2014/main" id="{9A590EBF-7426-4457-B458-7B036AC0296D}"/>
+                <a16:creationId xmlns:a16="http://schemas.microsoft.com/office/drawing/2014/main" id="{AB2FF324-A2CB-4CD5-A801-11220C63E0D5}"/>
               </a:ext>
             </a:extLst>
           </p:cNvPr>
@@ -5548,7 +5548,7 @@
           <p:cNvPr id="2" name="slide-title">
             <a:extLst xmlns:a="http://schemas.openxmlformats.org/drawingml/2006/main">
               <a:ext uri="{FF2B5EF4-FFF2-40B4-BE49-F238E27FC236}">
-                <a16:creationId xmlns:a16="http://schemas.microsoft.com/office/drawing/2014/main" id="{7F216759-3115-4694-A892-7972484926F1}"/>
+                <a16:creationId xmlns:a16="http://schemas.microsoft.com/office/drawing/2014/main" id="{0CB21787-093B-4536-BE9F-F6F5513FFA11}"/>
               </a:ext>
             </a:extLst>
           </p:cNvPr>
@@ -5610,7 +5610,7 @@
           <p:cNvPr id="3" name="footer-rule">
             <a:extLst xmlns:a="http://schemas.openxmlformats.org/drawingml/2006/main">
               <a:ext uri="{FF2B5EF4-FFF2-40B4-BE49-F238E27FC236}">
-                <a16:creationId xmlns:a16="http://schemas.microsoft.com/office/drawing/2014/main" id="{7FE2DCB3-5590-4BEF-8AD1-C1A0ED293B8F}"/>
+                <a16:creationId xmlns:a16="http://schemas.microsoft.com/office/drawing/2014/main" id="{D026759E-DEAA-42B6-BC19-0FBB4FE4F99F}"/>
               </a:ext>
             </a:extLst>
           </p:cNvPr>
@@ -5641,7 +5641,7 @@
           <p:cNvPr id="4" name="footer-book">
             <a:extLst xmlns:a="http://schemas.openxmlformats.org/drawingml/2006/main">
               <a:ext uri="{FF2B5EF4-FFF2-40B4-BE49-F238E27FC236}">
-                <a16:creationId xmlns:a16="http://schemas.microsoft.com/office/drawing/2014/main" id="{F89E2AF7-ACBD-4BF7-AFC0-E323917A8597}"/>
+                <a16:creationId xmlns:a16="http://schemas.microsoft.com/office/drawing/2014/main" id="{5DA2D79D-126B-44BF-84F6-EAA0D0078071}"/>
               </a:ext>
             </a:extLst>
           </p:cNvPr>
@@ -5703,7 +5703,7 @@
           <p:cNvPr id="5" name="footer-number">
             <a:extLst xmlns:a="http://schemas.openxmlformats.org/drawingml/2006/main">
               <a:ext uri="{FF2B5EF4-FFF2-40B4-BE49-F238E27FC236}">
-                <a16:creationId xmlns:a16="http://schemas.microsoft.com/office/drawing/2014/main" id="{1CEBB890-A80D-494E-9378-CB42BF956D1B}"/>
+                <a16:creationId xmlns:a16="http://schemas.microsoft.com/office/drawing/2014/main" id="{2377D262-FE6F-4598-9C1F-A5B0BAF4DD3C}"/>
               </a:ext>
             </a:extLst>
           </p:cNvPr>
@@ -5765,7 +5765,7 @@
           <p:cNvPr id="6" name="panel-1">
             <a:extLst xmlns:a="http://schemas.openxmlformats.org/drawingml/2006/main">
               <a:ext uri="{FF2B5EF4-FFF2-40B4-BE49-F238E27FC236}">
-                <a16:creationId xmlns:a16="http://schemas.microsoft.com/office/drawing/2014/main" id="{C0996322-49AC-4AB2-8D27-3BE18F375A2C}"/>
+                <a16:creationId xmlns:a16="http://schemas.microsoft.com/office/drawing/2014/main" id="{C63629CE-1C53-4B1A-A30C-538370550B62}"/>
               </a:ext>
             </a:extLst>
           </p:cNvPr>
@@ -5798,7 +5798,7 @@
           <p:cNvPr id="7" name="">
             <a:extLst xmlns:a="http://schemas.openxmlformats.org/drawingml/2006/main">
               <a:ext uri="{FF2B5EF4-FFF2-40B4-BE49-F238E27FC236}">
-                <a16:creationId xmlns:a16="http://schemas.microsoft.com/office/drawing/2014/main" id="{08772AB0-FCCF-463F-9851-E8175EAB91A8}"/>
+                <a16:creationId xmlns:a16="http://schemas.microsoft.com/office/drawing/2014/main" id="{81E6755D-AF23-47E8-BD80-E5AF2D45B825}"/>
               </a:ext>
             </a:extLst>
           </p:cNvPr>
@@ -5860,7 +5860,7 @@
           <p:cNvPr id="8" name="">
             <a:extLst xmlns:a="http://schemas.openxmlformats.org/drawingml/2006/main">
               <a:ext uri="{FF2B5EF4-FFF2-40B4-BE49-F238E27FC236}">
-                <a16:creationId xmlns:a16="http://schemas.microsoft.com/office/drawing/2014/main" id="{35DDE10A-77CE-4024-9CCD-C743AAB386F0}"/>
+                <a16:creationId xmlns:a16="http://schemas.microsoft.com/office/drawing/2014/main" id="{F8EBED03-E3CD-4A36-91C9-19359FEBCBDE}"/>
               </a:ext>
             </a:extLst>
           </p:cNvPr>
@@ -5922,7 +5922,7 @@
           <p:cNvPr id="9" name="">
             <a:extLst xmlns:a="http://schemas.openxmlformats.org/drawingml/2006/main">
               <a:ext uri="{FF2B5EF4-FFF2-40B4-BE49-F238E27FC236}">
-                <a16:creationId xmlns:a16="http://schemas.microsoft.com/office/drawing/2014/main" id="{B53DDEF8-D130-4AFF-B20C-4B5A172B0EB3}"/>
+                <a16:creationId xmlns:a16="http://schemas.microsoft.com/office/drawing/2014/main" id="{0B48A714-C73D-470D-9E84-0C103DA1DA17}"/>
               </a:ext>
             </a:extLst>
           </p:cNvPr>
@@ -5984,7 +5984,7 @@
           <p:cNvPr id="10" name="panel-2">
             <a:extLst xmlns:a="http://schemas.openxmlformats.org/drawingml/2006/main">
               <a:ext uri="{FF2B5EF4-FFF2-40B4-BE49-F238E27FC236}">
-                <a16:creationId xmlns:a16="http://schemas.microsoft.com/office/drawing/2014/main" id="{85F2B789-D603-4A81-8B7F-BBCEC5228071}"/>
+                <a16:creationId xmlns:a16="http://schemas.microsoft.com/office/drawing/2014/main" id="{B43FA1BF-A0C1-4EC0-957B-363E678F1D8A}"/>
               </a:ext>
             </a:extLst>
           </p:cNvPr>
@@ -6017,7 +6017,7 @@
           <p:cNvPr id="11" name="">
             <a:extLst xmlns:a="http://schemas.openxmlformats.org/drawingml/2006/main">
               <a:ext uri="{FF2B5EF4-FFF2-40B4-BE49-F238E27FC236}">
-                <a16:creationId xmlns:a16="http://schemas.microsoft.com/office/drawing/2014/main" id="{0E14EC4E-1D19-4176-A980-E0D30EC5033B}"/>
+                <a16:creationId xmlns:a16="http://schemas.microsoft.com/office/drawing/2014/main" id="{A8F3E2B7-78AD-4129-83EB-9C8E36E48862}"/>
               </a:ext>
             </a:extLst>
           </p:cNvPr>
@@ -6079,7 +6079,7 @@
           <p:cNvPr id="12" name="">
             <a:extLst xmlns:a="http://schemas.openxmlformats.org/drawingml/2006/main">
               <a:ext uri="{FF2B5EF4-FFF2-40B4-BE49-F238E27FC236}">
-                <a16:creationId xmlns:a16="http://schemas.microsoft.com/office/drawing/2014/main" id="{236BE917-A66E-49DC-A1F2-B06A045901C4}"/>
+                <a16:creationId xmlns:a16="http://schemas.microsoft.com/office/drawing/2014/main" id="{4D1C700A-817B-45A4-81AC-C9B185145924}"/>
               </a:ext>
             </a:extLst>
           </p:cNvPr>
@@ -6141,7 +6141,7 @@
           <p:cNvPr id="13" name="">
             <a:extLst xmlns:a="http://schemas.openxmlformats.org/drawingml/2006/main">
               <a:ext uri="{FF2B5EF4-FFF2-40B4-BE49-F238E27FC236}">
-                <a16:creationId xmlns:a16="http://schemas.microsoft.com/office/drawing/2014/main" id="{9AE78076-8CFC-4CAC-9E4C-166D68D9EAB1}"/>
+                <a16:creationId xmlns:a16="http://schemas.microsoft.com/office/drawing/2014/main" id="{649C0511-9125-4C4B-8F5C-70D5DE58C889}"/>
               </a:ext>
             </a:extLst>
           </p:cNvPr>
@@ -6203,7 +6203,7 @@
           <p:cNvPr id="14" name="">
             <a:extLst xmlns:a="http://schemas.openxmlformats.org/drawingml/2006/main">
               <a:ext uri="{FF2B5EF4-FFF2-40B4-BE49-F238E27FC236}">
-                <a16:creationId xmlns:a16="http://schemas.microsoft.com/office/drawing/2014/main" id="{C5B4C874-4D48-46E7-885D-81A6CE45879B}"/>
+                <a16:creationId xmlns:a16="http://schemas.microsoft.com/office/drawing/2014/main" id="{3A233752-64AF-4385-9412-46A3AA9C6663}"/>
               </a:ext>
             </a:extLst>
           </p:cNvPr>
@@ -6263,7 +6263,7 @@
     </p:spTree>
     <p:extLst>
       <p:ext uri="{BB962C8B-B14F-4D97-AF65-F5344CB8AC3E}">
-        <p14:creationId xmlns:p14="http://schemas.microsoft.com/office/powerpoint/2010/main" val="990903110"/>
+        <p14:creationId xmlns:p14="http://schemas.microsoft.com/office/powerpoint/2010/main" val="1693543844"/>
       </p:ext>
     </p:extLst>
   </p:cSld>
@@ -6294,7 +6294,7 @@
           <p:cNvPr id="10" name="">
             <a:extLst xmlns:a="http://schemas.openxmlformats.org/drawingml/2006/main">
               <a:ext uri="{FF2B5EF4-FFF2-40B4-BE49-F238E27FC236}">
-                <a16:creationId xmlns:a16="http://schemas.microsoft.com/office/drawing/2014/main" id="{04A61E7D-C7DB-4055-A385-E58CF29D969C}"/>
+                <a16:creationId xmlns:a16="http://schemas.microsoft.com/office/drawing/2014/main" id="{5B69C98A-B00B-4C0D-9436-BCC064F7C206}"/>
               </a:ext>
             </a:extLst>
           </p:cNvPr>
@@ -6356,7 +6356,7 @@
           <p:cNvPr id="2" name="">
             <a:extLst xmlns:a="http://schemas.openxmlformats.org/drawingml/2006/main">
               <a:ext uri="{FF2B5EF4-FFF2-40B4-BE49-F238E27FC236}">
-                <a16:creationId xmlns:a16="http://schemas.microsoft.com/office/drawing/2014/main" id="{2C7274B9-8778-4495-8524-E39BDC12A620}"/>
+                <a16:creationId xmlns:a16="http://schemas.microsoft.com/office/drawing/2014/main" id="{B19EBA5E-B3FF-4FC8-B4A2-017D98BF72FF}"/>
               </a:ext>
             </a:extLst>
           </p:cNvPr>
@@ -6418,7 +6418,7 @@
           <p:cNvPr id="3" name="big-statement">
             <a:extLst xmlns:a="http://schemas.openxmlformats.org/drawingml/2006/main">
               <a:ext uri="{FF2B5EF4-FFF2-40B4-BE49-F238E27FC236}">
-                <a16:creationId xmlns:a16="http://schemas.microsoft.com/office/drawing/2014/main" id="{641D42D4-E897-465D-BA16-71CB38CF12D4}"/>
+                <a16:creationId xmlns:a16="http://schemas.microsoft.com/office/drawing/2014/main" id="{A92309BA-2278-45EE-82E7-464E29D37FF7}"/>
               </a:ext>
             </a:extLst>
           </p:cNvPr>
@@ -6480,7 +6480,7 @@
           <p:cNvPr id="4" name="bullet-mark-1">
             <a:extLst xmlns:a="http://schemas.openxmlformats.org/drawingml/2006/main">
               <a:ext uri="{FF2B5EF4-FFF2-40B4-BE49-F238E27FC236}">
-                <a16:creationId xmlns:a16="http://schemas.microsoft.com/office/drawing/2014/main" id="{D1892816-06D2-404E-B9BB-E0AC478DCC51}"/>
+                <a16:creationId xmlns:a16="http://schemas.microsoft.com/office/drawing/2014/main" id="{69EFB515-3DEB-4679-B8EA-223A8BF725E6}"/>
               </a:ext>
             </a:extLst>
           </p:cNvPr>
@@ -6542,7 +6542,7 @@
           <p:cNvPr id="5" name="bullet-1">
             <a:extLst xmlns:a="http://schemas.openxmlformats.org/drawingml/2006/main">
               <a:ext uri="{FF2B5EF4-FFF2-40B4-BE49-F238E27FC236}">
-                <a16:creationId xmlns:a16="http://schemas.microsoft.com/office/drawing/2014/main" id="{8E50358E-5BD3-4500-9473-B3156E2E4298}"/>
+                <a16:creationId xmlns:a16="http://schemas.microsoft.com/office/drawing/2014/main" id="{D5BCF8EB-E867-466C-8A4B-38EA99EC232B}"/>
               </a:ext>
             </a:extLst>
           </p:cNvPr>
@@ -6604,7 +6604,7 @@
           <p:cNvPr id="6" name="bullet-mark-2">
             <a:extLst xmlns:a="http://schemas.openxmlformats.org/drawingml/2006/main">
               <a:ext uri="{FF2B5EF4-FFF2-40B4-BE49-F238E27FC236}">
-                <a16:creationId xmlns:a16="http://schemas.microsoft.com/office/drawing/2014/main" id="{EF16824C-78DD-47FF-B320-C7BD996D4758}"/>
+                <a16:creationId xmlns:a16="http://schemas.microsoft.com/office/drawing/2014/main" id="{A77389AC-9A00-4623-8AA2-9932A70EF22F}"/>
               </a:ext>
             </a:extLst>
           </p:cNvPr>
@@ -6666,7 +6666,7 @@
           <p:cNvPr id="7" name="bullet-2">
             <a:extLst xmlns:a="http://schemas.openxmlformats.org/drawingml/2006/main">
               <a:ext uri="{FF2B5EF4-FFF2-40B4-BE49-F238E27FC236}">
-                <a16:creationId xmlns:a16="http://schemas.microsoft.com/office/drawing/2014/main" id="{46BD12FE-93A8-4FFA-8FBA-72CDCE1CBCDE}"/>
+                <a16:creationId xmlns:a16="http://schemas.microsoft.com/office/drawing/2014/main" id="{FBEFEB9C-40B1-422A-9FB3-477841288726}"/>
               </a:ext>
             </a:extLst>
           </p:cNvPr>
@@ -6728,7 +6728,7 @@
           <p:cNvPr id="8" name="bullet-mark-3">
             <a:extLst xmlns:a="http://schemas.openxmlformats.org/drawingml/2006/main">
               <a:ext uri="{FF2B5EF4-FFF2-40B4-BE49-F238E27FC236}">
-                <a16:creationId xmlns:a16="http://schemas.microsoft.com/office/drawing/2014/main" id="{AC092A07-9622-4576-8E21-30E522B7F66F}"/>
+                <a16:creationId xmlns:a16="http://schemas.microsoft.com/office/drawing/2014/main" id="{05C846C0-4AC4-429A-9418-75CD67857641}"/>
               </a:ext>
             </a:extLst>
           </p:cNvPr>
@@ -6790,7 +6790,7 @@
           <p:cNvPr id="9" name="bullet-3">
             <a:extLst xmlns:a="http://schemas.openxmlformats.org/drawingml/2006/main">
               <a:ext uri="{FF2B5EF4-FFF2-40B4-BE49-F238E27FC236}">
-                <a16:creationId xmlns:a16="http://schemas.microsoft.com/office/drawing/2014/main" id="{E8B86DE0-8871-4436-AC24-3B12920D93B9}"/>
+                <a16:creationId xmlns:a16="http://schemas.microsoft.com/office/drawing/2014/main" id="{FC39827F-188E-42CD-9925-06E84E39E2BD}"/>
               </a:ext>
             </a:extLst>
           </p:cNvPr>
@@ -6850,7 +6850,7 @@
     </p:spTree>
     <p:extLst>
       <p:ext uri="{BB962C8B-B14F-4D97-AF65-F5344CB8AC3E}">
-        <p14:creationId xmlns:p14="http://schemas.microsoft.com/office/powerpoint/2010/main" val="331000841"/>
+        <p14:creationId xmlns:p14="http://schemas.microsoft.com/office/powerpoint/2010/main" val="1348808423"/>
       </p:ext>
     </p:extLst>
   </p:cSld>
@@ -6881,7 +6881,7 @@
           <p:cNvPr id="8" name="chapter-label">
             <a:extLst xmlns:a="http://schemas.openxmlformats.org/drawingml/2006/main">
               <a:ext uri="{FF2B5EF4-FFF2-40B4-BE49-F238E27FC236}">
-                <a16:creationId xmlns:a16="http://schemas.microsoft.com/office/drawing/2014/main" id="{96470265-D8A9-4430-8DAE-B8F6AB041532}"/>
+                <a16:creationId xmlns:a16="http://schemas.microsoft.com/office/drawing/2014/main" id="{F3C8DC3E-71E1-4D6D-B1D4-D66FB7F2F3B6}"/>
               </a:ext>
             </a:extLst>
           </p:cNvPr>
@@ -6943,7 +6943,7 @@
           <p:cNvPr id="2" name="slide-title">
             <a:extLst xmlns:a="http://schemas.openxmlformats.org/drawingml/2006/main">
               <a:ext uri="{FF2B5EF4-FFF2-40B4-BE49-F238E27FC236}">
-                <a16:creationId xmlns:a16="http://schemas.microsoft.com/office/drawing/2014/main" id="{7E9DE87F-A87F-46BB-BBF4-0EE46B8DDA05}"/>
+                <a16:creationId xmlns:a16="http://schemas.microsoft.com/office/drawing/2014/main" id="{0A0ED004-4948-4DF6-9C6F-2FD0B354D60C}"/>
               </a:ext>
             </a:extLst>
           </p:cNvPr>
@@ -7005,7 +7005,7 @@
           <p:cNvPr id="3" name="footer-rule">
             <a:extLst xmlns:a="http://schemas.openxmlformats.org/drawingml/2006/main">
               <a:ext uri="{FF2B5EF4-FFF2-40B4-BE49-F238E27FC236}">
-                <a16:creationId xmlns:a16="http://schemas.microsoft.com/office/drawing/2014/main" id="{59BCCB8F-4192-4EE7-8460-1BE111B886C1}"/>
+                <a16:creationId xmlns:a16="http://schemas.microsoft.com/office/drawing/2014/main" id="{4DD7DA99-37D1-47BF-ADDE-308CB78A2408}"/>
               </a:ext>
             </a:extLst>
           </p:cNvPr>
@@ -7036,7 +7036,7 @@
           <p:cNvPr id="4" name="footer-book">
             <a:extLst xmlns:a="http://schemas.openxmlformats.org/drawingml/2006/main">
               <a:ext uri="{FF2B5EF4-FFF2-40B4-BE49-F238E27FC236}">
-                <a16:creationId xmlns:a16="http://schemas.microsoft.com/office/drawing/2014/main" id="{79FD34F6-BBB2-42E7-8C2E-96A2147FCB4D}"/>
+                <a16:creationId xmlns:a16="http://schemas.microsoft.com/office/drawing/2014/main" id="{A018424F-E6AE-46EF-9C57-4BD8774D207C}"/>
               </a:ext>
             </a:extLst>
           </p:cNvPr>
@@ -7098,7 +7098,7 @@
           <p:cNvPr id="5" name="footer-number">
             <a:extLst xmlns:a="http://schemas.openxmlformats.org/drawingml/2006/main">
               <a:ext uri="{FF2B5EF4-FFF2-40B4-BE49-F238E27FC236}">
-                <a16:creationId xmlns:a16="http://schemas.microsoft.com/office/drawing/2014/main" id="{049044BB-196B-4DCD-9C31-ED38F2EC9064}"/>
+                <a16:creationId xmlns:a16="http://schemas.microsoft.com/office/drawing/2014/main" id="{169456CD-ECF6-4D6C-9BDA-FA5C91DBB12A}"/>
               </a:ext>
             </a:extLst>
           </p:cNvPr>
@@ -7164,7 +7164,7 @@
           <p:nvPr/>
         </p:nvPicPr>
         <p:blipFill>
-          <a:blip xmlns:r="http://schemas.openxmlformats.org/officeDocument/2006/relationships" xmlns:a="http://schemas.openxmlformats.org/drawingml/2006/main" r:embed="R6c4327b6e95b4f41"/>
+          <a:blip xmlns:r="http://schemas.openxmlformats.org/officeDocument/2006/relationships" xmlns:a="http://schemas.openxmlformats.org/drawingml/2006/main" r:embed="R12a2b73194fe415d"/>
           <a:stretch xmlns:a="http://schemas.openxmlformats.org/drawingml/2006/main"/>
         </p:blipFill>
         <p:spPr>
@@ -7182,7 +7182,7 @@
           <p:cNvPr id="7" name="">
             <a:extLst xmlns:a="http://schemas.openxmlformats.org/drawingml/2006/main">
               <a:ext uri="{FF2B5EF4-FFF2-40B4-BE49-F238E27FC236}">
-                <a16:creationId xmlns:a16="http://schemas.microsoft.com/office/drawing/2014/main" id="{B6ACB7AD-E1C4-4CBD-88A1-BE94ADEDF780}"/>
+                <a16:creationId xmlns:a16="http://schemas.microsoft.com/office/drawing/2014/main" id="{C9C9FB24-9D1E-451A-906F-B2B3A87E06CC}"/>
               </a:ext>
             </a:extLst>
           </p:cNvPr>
@@ -7242,7 +7242,7 @@
     </p:spTree>
     <p:extLst>
       <p:ext uri="{BB962C8B-B14F-4D97-AF65-F5344CB8AC3E}">
-        <p14:creationId xmlns:p14="http://schemas.microsoft.com/office/powerpoint/2010/main" val="341246329"/>
+        <p14:creationId xmlns:p14="http://schemas.microsoft.com/office/powerpoint/2010/main" val="979311901"/>
       </p:ext>
     </p:extLst>
   </p:cSld>
@@ -7273,7 +7273,7 @@
           <p:cNvPr id="19" name="chapter-label">
             <a:extLst xmlns:a="http://schemas.openxmlformats.org/drawingml/2006/main">
               <a:ext uri="{FF2B5EF4-FFF2-40B4-BE49-F238E27FC236}">
-                <a16:creationId xmlns:a16="http://schemas.microsoft.com/office/drawing/2014/main" id="{5355758D-9579-4C6F-9EF3-05614377D542}"/>
+                <a16:creationId xmlns:a16="http://schemas.microsoft.com/office/drawing/2014/main" id="{FC04EC12-6343-4452-B028-42E35FBC31EE}"/>
               </a:ext>
             </a:extLst>
           </p:cNvPr>
@@ -7335,7 +7335,7 @@
           <p:cNvPr id="2" name="slide-title">
             <a:extLst xmlns:a="http://schemas.openxmlformats.org/drawingml/2006/main">
               <a:ext uri="{FF2B5EF4-FFF2-40B4-BE49-F238E27FC236}">
-                <a16:creationId xmlns:a16="http://schemas.microsoft.com/office/drawing/2014/main" id="{51B6E113-2975-4CDD-9DBA-643CA4C9FE0E}"/>
+                <a16:creationId xmlns:a16="http://schemas.microsoft.com/office/drawing/2014/main" id="{0C9ACD40-D598-482F-8C85-FD7DA9434AEC}"/>
               </a:ext>
             </a:extLst>
           </p:cNvPr>
@@ -7397,7 +7397,7 @@
           <p:cNvPr id="3" name="footer-rule">
             <a:extLst xmlns:a="http://schemas.openxmlformats.org/drawingml/2006/main">
               <a:ext uri="{FF2B5EF4-FFF2-40B4-BE49-F238E27FC236}">
-                <a16:creationId xmlns:a16="http://schemas.microsoft.com/office/drawing/2014/main" id="{D79EAD62-4F3A-4712-83D0-149821CE5133}"/>
+                <a16:creationId xmlns:a16="http://schemas.microsoft.com/office/drawing/2014/main" id="{498C8AEE-5798-4421-B729-547A3D8CE2C0}"/>
               </a:ext>
             </a:extLst>
           </p:cNvPr>
@@ -7428,7 +7428,7 @@
           <p:cNvPr id="4" name="footer-book">
             <a:extLst xmlns:a="http://schemas.openxmlformats.org/drawingml/2006/main">
               <a:ext uri="{FF2B5EF4-FFF2-40B4-BE49-F238E27FC236}">
-                <a16:creationId xmlns:a16="http://schemas.microsoft.com/office/drawing/2014/main" id="{D7AC3EB1-88D5-491B-A49A-C2A665639E8A}"/>
+                <a16:creationId xmlns:a16="http://schemas.microsoft.com/office/drawing/2014/main" id="{1CB2C327-CC8A-4C7B-8740-7269BE757557}"/>
               </a:ext>
             </a:extLst>
           </p:cNvPr>
@@ -7490,7 +7490,7 @@
           <p:cNvPr id="5" name="footer-number">
             <a:extLst xmlns:a="http://schemas.openxmlformats.org/drawingml/2006/main">
               <a:ext uri="{FF2B5EF4-FFF2-40B4-BE49-F238E27FC236}">
-                <a16:creationId xmlns:a16="http://schemas.microsoft.com/office/drawing/2014/main" id="{48BEFECE-A45C-4A4D-B82A-C805DE576446}"/>
+                <a16:creationId xmlns:a16="http://schemas.microsoft.com/office/drawing/2014/main" id="{660530EB-5F67-46A5-91D9-39A4D7F70E0D}"/>
               </a:ext>
             </a:extLst>
           </p:cNvPr>
@@ -7552,7 +7552,7 @@
           <p:cNvPr id="6" name="panel-1">
             <a:extLst xmlns:a="http://schemas.openxmlformats.org/drawingml/2006/main">
               <a:ext uri="{FF2B5EF4-FFF2-40B4-BE49-F238E27FC236}">
-                <a16:creationId xmlns:a16="http://schemas.microsoft.com/office/drawing/2014/main" id="{67CCF186-8FC5-4411-AF0D-1E3025C7EE0C}"/>
+                <a16:creationId xmlns:a16="http://schemas.microsoft.com/office/drawing/2014/main" id="{A3478FC8-62E3-4DE0-877E-70A4E6505DD2}"/>
               </a:ext>
             </a:extLst>
           </p:cNvPr>
@@ -7585,7 +7585,7 @@
           <p:cNvPr id="7" name="">
             <a:extLst xmlns:a="http://schemas.openxmlformats.org/drawingml/2006/main">
               <a:ext uri="{FF2B5EF4-FFF2-40B4-BE49-F238E27FC236}">
-                <a16:creationId xmlns:a16="http://schemas.microsoft.com/office/drawing/2014/main" id="{D1CAFC30-D9EC-4383-A938-850DBE86162B}"/>
+                <a16:creationId xmlns:a16="http://schemas.microsoft.com/office/drawing/2014/main" id="{F8038B91-0041-4FB0-8F96-FC659A25A8F2}"/>
               </a:ext>
             </a:extLst>
           </p:cNvPr>
@@ -7647,7 +7647,7 @@
           <p:cNvPr id="8" name="">
             <a:extLst xmlns:a="http://schemas.openxmlformats.org/drawingml/2006/main">
               <a:ext uri="{FF2B5EF4-FFF2-40B4-BE49-F238E27FC236}">
-                <a16:creationId xmlns:a16="http://schemas.microsoft.com/office/drawing/2014/main" id="{049AD1CC-BCEB-438D-95A5-45C1F9839514}"/>
+                <a16:creationId xmlns:a16="http://schemas.microsoft.com/office/drawing/2014/main" id="{EDDF1EBD-0DA7-42D3-A361-E9D0E3EED068}"/>
               </a:ext>
             </a:extLst>
           </p:cNvPr>
@@ -7709,7 +7709,7 @@
           <p:cNvPr id="9" name="">
             <a:extLst xmlns:a="http://schemas.openxmlformats.org/drawingml/2006/main">
               <a:ext uri="{FF2B5EF4-FFF2-40B4-BE49-F238E27FC236}">
-                <a16:creationId xmlns:a16="http://schemas.microsoft.com/office/drawing/2014/main" id="{E96E3523-53BC-4BF3-AC8C-692CE4891B85}"/>
+                <a16:creationId xmlns:a16="http://schemas.microsoft.com/office/drawing/2014/main" id="{8DEC17BE-D86D-4089-8F49-CD52F71CB70F}"/>
               </a:ext>
             </a:extLst>
           </p:cNvPr>
@@ -7771,7 +7771,7 @@
           <p:cNvPr id="10" name="panel-2">
             <a:extLst xmlns:a="http://schemas.openxmlformats.org/drawingml/2006/main">
               <a:ext uri="{FF2B5EF4-FFF2-40B4-BE49-F238E27FC236}">
-                <a16:creationId xmlns:a16="http://schemas.microsoft.com/office/drawing/2014/main" id="{7AB91560-A97E-4580-A331-AD2ED7B1A1EF}"/>
+                <a16:creationId xmlns:a16="http://schemas.microsoft.com/office/drawing/2014/main" id="{A9437BD4-377B-48EB-91BB-119052A2F675}"/>
               </a:ext>
             </a:extLst>
           </p:cNvPr>
@@ -7804,7 +7804,7 @@
           <p:cNvPr id="11" name="">
             <a:extLst xmlns:a="http://schemas.openxmlformats.org/drawingml/2006/main">
               <a:ext uri="{FF2B5EF4-FFF2-40B4-BE49-F238E27FC236}">
-                <a16:creationId xmlns:a16="http://schemas.microsoft.com/office/drawing/2014/main" id="{AEE7761E-6CB1-4283-8572-09215AEBD155}"/>
+                <a16:creationId xmlns:a16="http://schemas.microsoft.com/office/drawing/2014/main" id="{0BC357FC-46CB-4F55-8C36-A2660239D8BA}"/>
               </a:ext>
             </a:extLst>
           </p:cNvPr>
@@ -7866,7 +7866,7 @@
           <p:cNvPr id="12" name="">
             <a:extLst xmlns:a="http://schemas.openxmlformats.org/drawingml/2006/main">
               <a:ext uri="{FF2B5EF4-FFF2-40B4-BE49-F238E27FC236}">
-                <a16:creationId xmlns:a16="http://schemas.microsoft.com/office/drawing/2014/main" id="{F58D2C2F-E3F0-480D-8E4B-7E31486B1399}"/>
+                <a16:creationId xmlns:a16="http://schemas.microsoft.com/office/drawing/2014/main" id="{5030A390-2E35-40FB-850E-C26DDDD06284}"/>
               </a:ext>
             </a:extLst>
           </p:cNvPr>
@@ -7928,7 +7928,7 @@
           <p:cNvPr id="13" name="">
             <a:extLst xmlns:a="http://schemas.openxmlformats.org/drawingml/2006/main">
               <a:ext uri="{FF2B5EF4-FFF2-40B4-BE49-F238E27FC236}">
-                <a16:creationId xmlns:a16="http://schemas.microsoft.com/office/drawing/2014/main" id="{9E529572-0C67-4C0D-93EE-CBD1C1405991}"/>
+                <a16:creationId xmlns:a16="http://schemas.microsoft.com/office/drawing/2014/main" id="{029EB711-CC73-4C2A-95D2-0524300F1B91}"/>
               </a:ext>
             </a:extLst>
           </p:cNvPr>
@@ -7990,7 +7990,7 @@
           <p:cNvPr id="14" name="panel-3">
             <a:extLst xmlns:a="http://schemas.openxmlformats.org/drawingml/2006/main">
               <a:ext uri="{FF2B5EF4-FFF2-40B4-BE49-F238E27FC236}">
-                <a16:creationId xmlns:a16="http://schemas.microsoft.com/office/drawing/2014/main" id="{8267300A-7940-4841-9DCD-04EB5818D4A3}"/>
+                <a16:creationId xmlns:a16="http://schemas.microsoft.com/office/drawing/2014/main" id="{951E4220-DDB9-4665-9C90-D758390A5A67}"/>
               </a:ext>
             </a:extLst>
           </p:cNvPr>
@@ -8023,7 +8023,7 @@
           <p:cNvPr id="15" name="">
             <a:extLst xmlns:a="http://schemas.openxmlformats.org/drawingml/2006/main">
               <a:ext uri="{FF2B5EF4-FFF2-40B4-BE49-F238E27FC236}">
-                <a16:creationId xmlns:a16="http://schemas.microsoft.com/office/drawing/2014/main" id="{A5B2077B-11AB-4348-BF7B-6827626B6C9D}"/>
+                <a16:creationId xmlns:a16="http://schemas.microsoft.com/office/drawing/2014/main" id="{7A22E00B-F1D0-4020-944D-F84A6401C9C3}"/>
               </a:ext>
             </a:extLst>
           </p:cNvPr>
@@ -8085,7 +8085,7 @@
           <p:cNvPr id="16" name="">
             <a:extLst xmlns:a="http://schemas.openxmlformats.org/drawingml/2006/main">
               <a:ext uri="{FF2B5EF4-FFF2-40B4-BE49-F238E27FC236}">
-                <a16:creationId xmlns:a16="http://schemas.microsoft.com/office/drawing/2014/main" id="{1BE3B802-A765-4261-85A4-B4BCC3BD8883}"/>
+                <a16:creationId xmlns:a16="http://schemas.microsoft.com/office/drawing/2014/main" id="{1008E22E-865B-448A-9856-B7A63E89EFB8}"/>
               </a:ext>
             </a:extLst>
           </p:cNvPr>
@@ -8147,7 +8147,7 @@
           <p:cNvPr id="17" name="">
             <a:extLst xmlns:a="http://schemas.openxmlformats.org/drawingml/2006/main">
               <a:ext uri="{FF2B5EF4-FFF2-40B4-BE49-F238E27FC236}">
-                <a16:creationId xmlns:a16="http://schemas.microsoft.com/office/drawing/2014/main" id="{5EB148EF-A94A-4171-B1D0-B2019AA57CA4}"/>
+                <a16:creationId xmlns:a16="http://schemas.microsoft.com/office/drawing/2014/main" id="{D28B2F5D-772F-4946-B342-92269667B447}"/>
               </a:ext>
             </a:extLst>
           </p:cNvPr>
@@ -8209,7 +8209,7 @@
           <p:cNvPr id="18" name="">
             <a:extLst xmlns:a="http://schemas.openxmlformats.org/drawingml/2006/main">
               <a:ext uri="{FF2B5EF4-FFF2-40B4-BE49-F238E27FC236}">
-                <a16:creationId xmlns:a16="http://schemas.microsoft.com/office/drawing/2014/main" id="{57329D1E-6AD3-4D02-B8BF-1525AADEEDED}"/>
+                <a16:creationId xmlns:a16="http://schemas.microsoft.com/office/drawing/2014/main" id="{62BEEF26-5D26-43EF-B9B5-298636BEE1E6}"/>
               </a:ext>
             </a:extLst>
           </p:cNvPr>
@@ -8269,7 +8269,7 @@
     </p:spTree>
     <p:extLst>
       <p:ext uri="{BB962C8B-B14F-4D97-AF65-F5344CB8AC3E}">
-        <p14:creationId xmlns:p14="http://schemas.microsoft.com/office/powerpoint/2010/main" val="575322401"/>
+        <p14:creationId xmlns:p14="http://schemas.microsoft.com/office/powerpoint/2010/main" val="1720488930"/>
       </p:ext>
     </p:extLst>
   </p:cSld>
@@ -8300,7 +8300,7 @@
           <p:cNvPr id="17" name="chapter-label">
             <a:extLst xmlns:a="http://schemas.openxmlformats.org/drawingml/2006/main">
               <a:ext uri="{FF2B5EF4-FFF2-40B4-BE49-F238E27FC236}">
-                <a16:creationId xmlns:a16="http://schemas.microsoft.com/office/drawing/2014/main" id="{36B9F31C-9656-41DF-80CB-917102CF294F}"/>
+                <a16:creationId xmlns:a16="http://schemas.microsoft.com/office/drawing/2014/main" id="{63DEB131-5419-44FF-B4CF-1F435B842BAF}"/>
               </a:ext>
             </a:extLst>
           </p:cNvPr>
@@ -8362,7 +8362,7 @@
           <p:cNvPr id="2" name="slide-title">
             <a:extLst xmlns:a="http://schemas.openxmlformats.org/drawingml/2006/main">
               <a:ext uri="{FF2B5EF4-FFF2-40B4-BE49-F238E27FC236}">
-                <a16:creationId xmlns:a16="http://schemas.microsoft.com/office/drawing/2014/main" id="{3A33B790-CDFB-46AB-9E95-600A55DBA9B7}"/>
+                <a16:creationId xmlns:a16="http://schemas.microsoft.com/office/drawing/2014/main" id="{6A123AD2-F1F2-4F6B-87FF-44BDF5AFAAA3}"/>
               </a:ext>
             </a:extLst>
           </p:cNvPr>
@@ -8424,7 +8424,7 @@
           <p:cNvPr id="3" name="footer-rule">
             <a:extLst xmlns:a="http://schemas.openxmlformats.org/drawingml/2006/main">
               <a:ext uri="{FF2B5EF4-FFF2-40B4-BE49-F238E27FC236}">
-                <a16:creationId xmlns:a16="http://schemas.microsoft.com/office/drawing/2014/main" id="{F670D736-4714-4809-93C1-1AD7DDEDDBE9}"/>
+                <a16:creationId xmlns:a16="http://schemas.microsoft.com/office/drawing/2014/main" id="{DE39101A-33F8-4EFD-9F74-5C597CDFE682}"/>
               </a:ext>
             </a:extLst>
           </p:cNvPr>
@@ -8455,7 +8455,7 @@
           <p:cNvPr id="4" name="footer-book">
             <a:extLst xmlns:a="http://schemas.openxmlformats.org/drawingml/2006/main">
               <a:ext uri="{FF2B5EF4-FFF2-40B4-BE49-F238E27FC236}">
-                <a16:creationId xmlns:a16="http://schemas.microsoft.com/office/drawing/2014/main" id="{45FEBEF7-4202-4F21-9977-2E23BBF57679}"/>
+                <a16:creationId xmlns:a16="http://schemas.microsoft.com/office/drawing/2014/main" id="{3BA12EDF-81B3-4337-BF4E-2DFA75403764}"/>
               </a:ext>
             </a:extLst>
           </p:cNvPr>
@@ -8517,7 +8517,7 @@
           <p:cNvPr id="5" name="footer-number">
             <a:extLst xmlns:a="http://schemas.openxmlformats.org/drawingml/2006/main">
               <a:ext uri="{FF2B5EF4-FFF2-40B4-BE49-F238E27FC236}">
-                <a16:creationId xmlns:a16="http://schemas.microsoft.com/office/drawing/2014/main" id="{D53F69B2-B1EB-46D4-B5B4-213E889A8A18}"/>
+                <a16:creationId xmlns:a16="http://schemas.microsoft.com/office/drawing/2014/main" id="{FC4A2DE2-6A96-4E74-A210-6795BE2DDD3A}"/>
               </a:ext>
             </a:extLst>
           </p:cNvPr>
@@ -8579,7 +8579,7 @@
           <p:cNvPr id="6" name="bullet-mark-1">
             <a:extLst xmlns:a="http://schemas.openxmlformats.org/drawingml/2006/main">
               <a:ext uri="{FF2B5EF4-FFF2-40B4-BE49-F238E27FC236}">
-                <a16:creationId xmlns:a16="http://schemas.microsoft.com/office/drawing/2014/main" id="{62A59250-8455-4CBF-81FB-A356C2341AAE}"/>
+                <a16:creationId xmlns:a16="http://schemas.microsoft.com/office/drawing/2014/main" id="{3CC496EB-E0E3-420C-8209-CBEFFE4FE27F}"/>
               </a:ext>
             </a:extLst>
           </p:cNvPr>
@@ -8641,7 +8641,7 @@
           <p:cNvPr id="7" name="bullet-1">
             <a:extLst xmlns:a="http://schemas.openxmlformats.org/drawingml/2006/main">
               <a:ext uri="{FF2B5EF4-FFF2-40B4-BE49-F238E27FC236}">
-                <a16:creationId xmlns:a16="http://schemas.microsoft.com/office/drawing/2014/main" id="{A43FB4D0-2981-4DB8-9C7C-07D847670587}"/>
+                <a16:creationId xmlns:a16="http://schemas.microsoft.com/office/drawing/2014/main" id="{46546681-54CA-4A22-8B63-D1F079CE6F18}"/>
               </a:ext>
             </a:extLst>
           </p:cNvPr>
@@ -8703,7 +8703,7 @@
           <p:cNvPr id="8" name="bullet-mark-2">
             <a:extLst xmlns:a="http://schemas.openxmlformats.org/drawingml/2006/main">
               <a:ext uri="{FF2B5EF4-FFF2-40B4-BE49-F238E27FC236}">
-                <a16:creationId xmlns:a16="http://schemas.microsoft.com/office/drawing/2014/main" id="{71911F25-D932-4C64-B8DC-226AFF441047}"/>
+                <a16:creationId xmlns:a16="http://schemas.microsoft.com/office/drawing/2014/main" id="{0E423D2C-71B7-400A-9B9B-EEEAEB8B4D32}"/>
               </a:ext>
             </a:extLst>
           </p:cNvPr>
@@ -8765,7 +8765,7 @@
           <p:cNvPr id="9" name="bullet-2">
             <a:extLst xmlns:a="http://schemas.openxmlformats.org/drawingml/2006/main">
               <a:ext uri="{FF2B5EF4-FFF2-40B4-BE49-F238E27FC236}">
-                <a16:creationId xmlns:a16="http://schemas.microsoft.com/office/drawing/2014/main" id="{8033BB72-5CEA-4BBD-B6EE-A529B3CE43CA}"/>
+                <a16:creationId xmlns:a16="http://schemas.microsoft.com/office/drawing/2014/main" id="{42B02614-97AB-4444-ABCA-CE94BEEAD067}"/>
               </a:ext>
             </a:extLst>
           </p:cNvPr>
@@ -8827,7 +8827,7 @@
           <p:cNvPr id="10" name="bullet-mark-3">
             <a:extLst xmlns:a="http://schemas.openxmlformats.org/drawingml/2006/main">
               <a:ext uri="{FF2B5EF4-FFF2-40B4-BE49-F238E27FC236}">
-                <a16:creationId xmlns:a16="http://schemas.microsoft.com/office/drawing/2014/main" id="{DBE0EAF3-F014-4BDE-9E52-F0D18114A515}"/>
+                <a16:creationId xmlns:a16="http://schemas.microsoft.com/office/drawing/2014/main" id="{A1D0702A-5C3A-4230-BAAB-89002357B185}"/>
               </a:ext>
             </a:extLst>
           </p:cNvPr>
@@ -8889,7 +8889,7 @@
           <p:cNvPr id="11" name="bullet-3">
             <a:extLst xmlns:a="http://schemas.openxmlformats.org/drawingml/2006/main">
               <a:ext uri="{FF2B5EF4-FFF2-40B4-BE49-F238E27FC236}">
-                <a16:creationId xmlns:a16="http://schemas.microsoft.com/office/drawing/2014/main" id="{A3777916-8D6E-4F0E-845B-FD78AFB047B3}"/>
+                <a16:creationId xmlns:a16="http://schemas.microsoft.com/office/drawing/2014/main" id="{6F2E58F2-1B8E-4E06-8487-753CA35C2BC9}"/>
               </a:ext>
             </a:extLst>
           </p:cNvPr>
@@ -8951,7 +8951,7 @@
           <p:cNvPr id="12" name="bullet-mark-4">
             <a:extLst xmlns:a="http://schemas.openxmlformats.org/drawingml/2006/main">
               <a:ext uri="{FF2B5EF4-FFF2-40B4-BE49-F238E27FC236}">
-                <a16:creationId xmlns:a16="http://schemas.microsoft.com/office/drawing/2014/main" id="{ED8085E0-3584-4505-9FC3-3CA9EC9EDB87}"/>
+                <a16:creationId xmlns:a16="http://schemas.microsoft.com/office/drawing/2014/main" id="{E4C0C78B-67C6-483A-8CD3-7B786181761B}"/>
               </a:ext>
             </a:extLst>
           </p:cNvPr>
@@ -9013,7 +9013,7 @@
           <p:cNvPr id="13" name="bullet-4">
             <a:extLst xmlns:a="http://schemas.openxmlformats.org/drawingml/2006/main">
               <a:ext uri="{FF2B5EF4-FFF2-40B4-BE49-F238E27FC236}">
-                <a16:creationId xmlns:a16="http://schemas.microsoft.com/office/drawing/2014/main" id="{54A12837-BB3F-452D-8729-A99B8FBBD9B9}"/>
+                <a16:creationId xmlns:a16="http://schemas.microsoft.com/office/drawing/2014/main" id="{6A2A6193-7D4C-4F09-9650-AB65C0D14392}"/>
               </a:ext>
             </a:extLst>
           </p:cNvPr>
@@ -9075,7 +9075,7 @@
           <p:cNvPr id="14" name="bullet-mark-5">
             <a:extLst xmlns:a="http://schemas.openxmlformats.org/drawingml/2006/main">
               <a:ext uri="{FF2B5EF4-FFF2-40B4-BE49-F238E27FC236}">
-                <a16:creationId xmlns:a16="http://schemas.microsoft.com/office/drawing/2014/main" id="{4DDF4A6E-FD0E-4CF7-A492-9943401A25B7}"/>
+                <a16:creationId xmlns:a16="http://schemas.microsoft.com/office/drawing/2014/main" id="{14F2ECD4-C65C-4E9D-8E3E-E370D7371AA9}"/>
               </a:ext>
             </a:extLst>
           </p:cNvPr>
@@ -9137,7 +9137,7 @@
           <p:cNvPr id="15" name="bullet-5">
             <a:extLst xmlns:a="http://schemas.openxmlformats.org/drawingml/2006/main">
               <a:ext uri="{FF2B5EF4-FFF2-40B4-BE49-F238E27FC236}">
-                <a16:creationId xmlns:a16="http://schemas.microsoft.com/office/drawing/2014/main" id="{1212BC50-9236-4A1D-A1FB-ECCF0A848B9B}"/>
+                <a16:creationId xmlns:a16="http://schemas.microsoft.com/office/drawing/2014/main" id="{04CBCB42-ABC3-4EB6-934D-6DEC2E88E472}"/>
               </a:ext>
             </a:extLst>
           </p:cNvPr>
@@ -9199,7 +9199,7 @@
           <p:cNvPr id="16" name="">
             <a:extLst xmlns:a="http://schemas.openxmlformats.org/drawingml/2006/main">
               <a:ext uri="{FF2B5EF4-FFF2-40B4-BE49-F238E27FC236}">
-                <a16:creationId xmlns:a16="http://schemas.microsoft.com/office/drawing/2014/main" id="{68EC6543-D4CD-45D0-AB01-0A82BC2DEAAD}"/>
+                <a16:creationId xmlns:a16="http://schemas.microsoft.com/office/drawing/2014/main" id="{EBABB678-17BC-4BA4-94B8-7A0AAFEB5496}"/>
               </a:ext>
             </a:extLst>
           </p:cNvPr>
@@ -9259,7 +9259,7 @@
     </p:spTree>
     <p:extLst>
       <p:ext uri="{BB962C8B-B14F-4D97-AF65-F5344CB8AC3E}">
-        <p14:creationId xmlns:p14="http://schemas.microsoft.com/office/powerpoint/2010/main" val="201880953"/>
+        <p14:creationId xmlns:p14="http://schemas.microsoft.com/office/powerpoint/2010/main" val="686576133"/>
       </p:ext>
     </p:extLst>
   </p:cSld>
@@ -9290,7 +9290,7 @@
           <p:cNvPr id="15" name="chapter-label">
             <a:extLst xmlns:a="http://schemas.openxmlformats.org/drawingml/2006/main">
               <a:ext uri="{FF2B5EF4-FFF2-40B4-BE49-F238E27FC236}">
-                <a16:creationId xmlns:a16="http://schemas.microsoft.com/office/drawing/2014/main" id="{3D75DE0B-2447-4B8C-93E0-C5B30D606EAA}"/>
+                <a16:creationId xmlns:a16="http://schemas.microsoft.com/office/drawing/2014/main" id="{E26736C5-5749-40F8-BDE6-DE5E1705D8E7}"/>
               </a:ext>
             </a:extLst>
           </p:cNvPr>
@@ -9352,7 +9352,7 @@
           <p:cNvPr id="2" name="slide-title">
             <a:extLst xmlns:a="http://schemas.openxmlformats.org/drawingml/2006/main">
               <a:ext uri="{FF2B5EF4-FFF2-40B4-BE49-F238E27FC236}">
-                <a16:creationId xmlns:a16="http://schemas.microsoft.com/office/drawing/2014/main" id="{F35D8B84-C29D-45D7-80E6-1BECF9782957}"/>
+                <a16:creationId xmlns:a16="http://schemas.microsoft.com/office/drawing/2014/main" id="{886574D6-60F3-4CE0-B4CB-87234987E479}"/>
               </a:ext>
             </a:extLst>
           </p:cNvPr>
@@ -9414,7 +9414,7 @@
           <p:cNvPr id="3" name="footer-rule">
             <a:extLst xmlns:a="http://schemas.openxmlformats.org/drawingml/2006/main">
               <a:ext uri="{FF2B5EF4-FFF2-40B4-BE49-F238E27FC236}">
-                <a16:creationId xmlns:a16="http://schemas.microsoft.com/office/drawing/2014/main" id="{3627A50C-5E7E-49A4-891D-14F45C0F0861}"/>
+                <a16:creationId xmlns:a16="http://schemas.microsoft.com/office/drawing/2014/main" id="{E38D64AC-DAFA-4AA8-95D9-6F7B25DB5C4D}"/>
               </a:ext>
             </a:extLst>
           </p:cNvPr>
@@ -9445,7 +9445,7 @@
           <p:cNvPr id="4" name="footer-book">
             <a:extLst xmlns:a="http://schemas.openxmlformats.org/drawingml/2006/main">
               <a:ext uri="{FF2B5EF4-FFF2-40B4-BE49-F238E27FC236}">
-                <a16:creationId xmlns:a16="http://schemas.microsoft.com/office/drawing/2014/main" id="{D70117B5-237F-4A58-878B-32F99EA51DBF}"/>
+                <a16:creationId xmlns:a16="http://schemas.microsoft.com/office/drawing/2014/main" id="{928DBD2C-69C8-4145-9D4A-40A4D4CBA483}"/>
               </a:ext>
             </a:extLst>
           </p:cNvPr>
@@ -9507,7 +9507,7 @@
           <p:cNvPr id="5" name="footer-number">
             <a:extLst xmlns:a="http://schemas.openxmlformats.org/drawingml/2006/main">
               <a:ext uri="{FF2B5EF4-FFF2-40B4-BE49-F238E27FC236}">
-                <a16:creationId xmlns:a16="http://schemas.microsoft.com/office/drawing/2014/main" id="{5C49CA48-0F59-49E3-AC4B-44411F2B9E1B}"/>
+                <a16:creationId xmlns:a16="http://schemas.microsoft.com/office/drawing/2014/main" id="{B372737B-B36B-4919-864A-A81A66C4C9AA}"/>
               </a:ext>
             </a:extLst>
           </p:cNvPr>
@@ -9569,7 +9569,7 @@
           <p:cNvPr id="6" name="panel-1">
             <a:extLst xmlns:a="http://schemas.openxmlformats.org/drawingml/2006/main">
               <a:ext uri="{FF2B5EF4-FFF2-40B4-BE49-F238E27FC236}">
-                <a16:creationId xmlns:a16="http://schemas.microsoft.com/office/drawing/2014/main" id="{0DB798D2-94EB-4D95-A6AA-92214EEB0892}"/>
+                <a16:creationId xmlns:a16="http://schemas.microsoft.com/office/drawing/2014/main" id="{5AD59FE9-8E16-467B-9D27-1E2677BD994F}"/>
               </a:ext>
             </a:extLst>
           </p:cNvPr>
@@ -9602,7 +9602,7 @@
           <p:cNvPr id="7" name="">
             <a:extLst xmlns:a="http://schemas.openxmlformats.org/drawingml/2006/main">
               <a:ext uri="{FF2B5EF4-FFF2-40B4-BE49-F238E27FC236}">
-                <a16:creationId xmlns:a16="http://schemas.microsoft.com/office/drawing/2014/main" id="{37E62FC3-B5A0-4B43-B0E0-4998A3E0B701}"/>
+                <a16:creationId xmlns:a16="http://schemas.microsoft.com/office/drawing/2014/main" id="{AE7E76D6-02A0-46C2-97D8-A95360F250BB}"/>
               </a:ext>
             </a:extLst>
           </p:cNvPr>
@@ -9664,7 +9664,7 @@
           <p:cNvPr id="8" name="">
             <a:extLst xmlns:a="http://schemas.openxmlformats.org/drawingml/2006/main">
               <a:ext uri="{FF2B5EF4-FFF2-40B4-BE49-F238E27FC236}">
-                <a16:creationId xmlns:a16="http://schemas.microsoft.com/office/drawing/2014/main" id="{5911C862-AEB5-43A1-A5FE-821245FDFA33}"/>
+                <a16:creationId xmlns:a16="http://schemas.microsoft.com/office/drawing/2014/main" id="{819D769D-853E-4368-A2BA-0CA9C4CCF03C}"/>
               </a:ext>
             </a:extLst>
           </p:cNvPr>
@@ -9726,7 +9726,7 @@
           <p:cNvPr id="9" name="">
             <a:extLst xmlns:a="http://schemas.openxmlformats.org/drawingml/2006/main">
               <a:ext uri="{FF2B5EF4-FFF2-40B4-BE49-F238E27FC236}">
-                <a16:creationId xmlns:a16="http://schemas.microsoft.com/office/drawing/2014/main" id="{2F81EC3A-190C-4531-8B23-20C447CDC962}"/>
+                <a16:creationId xmlns:a16="http://schemas.microsoft.com/office/drawing/2014/main" id="{C3C776E9-B2C2-433D-A67B-7E842BDC6405}"/>
               </a:ext>
             </a:extLst>
           </p:cNvPr>
@@ -9788,7 +9788,7 @@
           <p:cNvPr id="10" name="panel-2">
             <a:extLst xmlns:a="http://schemas.openxmlformats.org/drawingml/2006/main">
               <a:ext uri="{FF2B5EF4-FFF2-40B4-BE49-F238E27FC236}">
-                <a16:creationId xmlns:a16="http://schemas.microsoft.com/office/drawing/2014/main" id="{F34A93E0-92EA-4E7B-9CDB-4CD63E9AF829}"/>
+                <a16:creationId xmlns:a16="http://schemas.microsoft.com/office/drawing/2014/main" id="{751C9C23-AA92-4330-8BA1-B2FC8051C830}"/>
               </a:ext>
             </a:extLst>
           </p:cNvPr>
@@ -9821,7 +9821,7 @@
           <p:cNvPr id="11" name="">
             <a:extLst xmlns:a="http://schemas.openxmlformats.org/drawingml/2006/main">
               <a:ext uri="{FF2B5EF4-FFF2-40B4-BE49-F238E27FC236}">
-                <a16:creationId xmlns:a16="http://schemas.microsoft.com/office/drawing/2014/main" id="{D26395AE-AA48-4D47-97F6-A3A513CED10F}"/>
+                <a16:creationId xmlns:a16="http://schemas.microsoft.com/office/drawing/2014/main" id="{0B0303AE-F59F-4CF3-8D71-249C3F7FF0A6}"/>
               </a:ext>
             </a:extLst>
           </p:cNvPr>
@@ -9883,7 +9883,7 @@
           <p:cNvPr id="12" name="">
             <a:extLst xmlns:a="http://schemas.openxmlformats.org/drawingml/2006/main">
               <a:ext uri="{FF2B5EF4-FFF2-40B4-BE49-F238E27FC236}">
-                <a16:creationId xmlns:a16="http://schemas.microsoft.com/office/drawing/2014/main" id="{31FF97B5-C362-446F-AA3C-90873CCC244D}"/>
+                <a16:creationId xmlns:a16="http://schemas.microsoft.com/office/drawing/2014/main" id="{222E04F7-A508-4372-AF5C-2EB069345F15}"/>
               </a:ext>
             </a:extLst>
           </p:cNvPr>
@@ -9945,7 +9945,7 @@
           <p:cNvPr id="13" name="">
             <a:extLst xmlns:a="http://schemas.openxmlformats.org/drawingml/2006/main">
               <a:ext uri="{FF2B5EF4-FFF2-40B4-BE49-F238E27FC236}">
-                <a16:creationId xmlns:a16="http://schemas.microsoft.com/office/drawing/2014/main" id="{6BB9F69E-98ED-4FB7-AA2A-8E3CB628CF91}"/>
+                <a16:creationId xmlns:a16="http://schemas.microsoft.com/office/drawing/2014/main" id="{6E4E77C1-0E65-4CE4-B78A-455EFCFB4B81}"/>
               </a:ext>
             </a:extLst>
           </p:cNvPr>
@@ -10007,7 +10007,7 @@
           <p:cNvPr id="14" name="">
             <a:extLst xmlns:a="http://schemas.openxmlformats.org/drawingml/2006/main">
               <a:ext uri="{FF2B5EF4-FFF2-40B4-BE49-F238E27FC236}">
-                <a16:creationId xmlns:a16="http://schemas.microsoft.com/office/drawing/2014/main" id="{7348E741-FF89-499F-BE40-E5566D47B3E8}"/>
+                <a16:creationId xmlns:a16="http://schemas.microsoft.com/office/drawing/2014/main" id="{8E11171D-DC52-4A1C-826B-B5DB6462D627}"/>
               </a:ext>
             </a:extLst>
           </p:cNvPr>
@@ -10067,7 +10067,7 @@
     </p:spTree>
     <p:extLst>
       <p:ext uri="{BB962C8B-B14F-4D97-AF65-F5344CB8AC3E}">
-        <p14:creationId xmlns:p14="http://schemas.microsoft.com/office/powerpoint/2010/main" val="2130508192"/>
+        <p14:creationId xmlns:p14="http://schemas.microsoft.com/office/powerpoint/2010/main" val="414908589"/>
       </p:ext>
     </p:extLst>
   </p:cSld>
@@ -10098,7 +10098,7 @@
           <p:cNvPr id="11" name="">
             <a:extLst xmlns:a="http://schemas.openxmlformats.org/drawingml/2006/main">
               <a:ext uri="{FF2B5EF4-FFF2-40B4-BE49-F238E27FC236}">
-                <a16:creationId xmlns:a16="http://schemas.microsoft.com/office/drawing/2014/main" id="{10526A78-58C5-479C-8992-A2C0F54A4F0F}"/>
+                <a16:creationId xmlns:a16="http://schemas.microsoft.com/office/drawing/2014/main" id="{9BE2CD63-69A9-41E6-A7C5-A5FC10B4D67A}"/>
               </a:ext>
             </a:extLst>
           </p:cNvPr>
@@ -10160,7 +10160,7 @@
           <p:cNvPr id="2" name="bullet-mark-1">
             <a:extLst xmlns:a="http://schemas.openxmlformats.org/drawingml/2006/main">
               <a:ext uri="{FF2B5EF4-FFF2-40B4-BE49-F238E27FC236}">
-                <a16:creationId xmlns:a16="http://schemas.microsoft.com/office/drawing/2014/main" id="{D02E98D5-57A9-405F-881C-C48A761720DB}"/>
+                <a16:creationId xmlns:a16="http://schemas.microsoft.com/office/drawing/2014/main" id="{49A63365-0D5D-4B30-860C-18CB7A054F09}"/>
               </a:ext>
             </a:extLst>
           </p:cNvPr>
@@ -10222,7 +10222,7 @@
           <p:cNvPr id="3" name="bullet-1">
             <a:extLst xmlns:a="http://schemas.openxmlformats.org/drawingml/2006/main">
               <a:ext uri="{FF2B5EF4-FFF2-40B4-BE49-F238E27FC236}">
-                <a16:creationId xmlns:a16="http://schemas.microsoft.com/office/drawing/2014/main" id="{C3FBB234-AFA8-4D59-9B42-04163AC6E10D}"/>
+                <a16:creationId xmlns:a16="http://schemas.microsoft.com/office/drawing/2014/main" id="{90995AF3-1AED-45DD-B73A-ED6DA8744193}"/>
               </a:ext>
             </a:extLst>
           </p:cNvPr>
@@ -10284,7 +10284,7 @@
           <p:cNvPr id="4" name="bullet-mark-2">
             <a:extLst xmlns:a="http://schemas.openxmlformats.org/drawingml/2006/main">
               <a:ext uri="{FF2B5EF4-FFF2-40B4-BE49-F238E27FC236}">
-                <a16:creationId xmlns:a16="http://schemas.microsoft.com/office/drawing/2014/main" id="{B995A743-B1AE-4C54-AD9C-203FB0BFE4E1}"/>
+                <a16:creationId xmlns:a16="http://schemas.microsoft.com/office/drawing/2014/main" id="{3AC08ACF-E74B-4477-BC8E-D4D82DE2887A}"/>
               </a:ext>
             </a:extLst>
           </p:cNvPr>
@@ -10346,7 +10346,7 @@
           <p:cNvPr id="5" name="bullet-2">
             <a:extLst xmlns:a="http://schemas.openxmlformats.org/drawingml/2006/main">
               <a:ext uri="{FF2B5EF4-FFF2-40B4-BE49-F238E27FC236}">
-                <a16:creationId xmlns:a16="http://schemas.microsoft.com/office/drawing/2014/main" id="{31CE7483-C537-4A9F-998E-A1EE14082B5C}"/>
+                <a16:creationId xmlns:a16="http://schemas.microsoft.com/office/drawing/2014/main" id="{76FDB0A1-D10B-4F8D-9495-23443104CE59}"/>
               </a:ext>
             </a:extLst>
           </p:cNvPr>
@@ -10408,7 +10408,7 @@
           <p:cNvPr id="6" name="bullet-mark-3">
             <a:extLst xmlns:a="http://schemas.openxmlformats.org/drawingml/2006/main">
               <a:ext uri="{FF2B5EF4-FFF2-40B4-BE49-F238E27FC236}">
-                <a16:creationId xmlns:a16="http://schemas.microsoft.com/office/drawing/2014/main" id="{65439737-308E-4780-A604-E897239B6120}"/>
+                <a16:creationId xmlns:a16="http://schemas.microsoft.com/office/drawing/2014/main" id="{6C02C4BC-F932-4A48-B896-405F816CF9CE}"/>
               </a:ext>
             </a:extLst>
           </p:cNvPr>
@@ -10470,7 +10470,7 @@
           <p:cNvPr id="7" name="bullet-3">
             <a:extLst xmlns:a="http://schemas.openxmlformats.org/drawingml/2006/main">
               <a:ext uri="{FF2B5EF4-FFF2-40B4-BE49-F238E27FC236}">
-                <a16:creationId xmlns:a16="http://schemas.microsoft.com/office/drawing/2014/main" id="{ABE10819-2D14-4820-86EF-8EC2B3DDFC65}"/>
+                <a16:creationId xmlns:a16="http://schemas.microsoft.com/office/drawing/2014/main" id="{09C56B23-3306-4587-9512-4B942C3E613C}"/>
               </a:ext>
             </a:extLst>
           </p:cNvPr>
@@ -10532,7 +10532,7 @@
           <p:cNvPr id="8" name="bullet-mark-4">
             <a:extLst xmlns:a="http://schemas.openxmlformats.org/drawingml/2006/main">
               <a:ext uri="{FF2B5EF4-FFF2-40B4-BE49-F238E27FC236}">
-                <a16:creationId xmlns:a16="http://schemas.microsoft.com/office/drawing/2014/main" id="{A745BC44-F473-4FCA-896B-DA3F8E98DD60}"/>
+                <a16:creationId xmlns:a16="http://schemas.microsoft.com/office/drawing/2014/main" id="{9E774001-66F4-4335-B6E5-A01E4095FA6F}"/>
               </a:ext>
             </a:extLst>
           </p:cNvPr>
@@ -10594,7 +10594,7 @@
           <p:cNvPr id="9" name="bullet-4">
             <a:extLst xmlns:a="http://schemas.openxmlformats.org/drawingml/2006/main">
               <a:ext uri="{FF2B5EF4-FFF2-40B4-BE49-F238E27FC236}">
-                <a16:creationId xmlns:a16="http://schemas.microsoft.com/office/drawing/2014/main" id="{B3BE9440-20E3-4340-8A37-2EFDABB6F3D0}"/>
+                <a16:creationId xmlns:a16="http://schemas.microsoft.com/office/drawing/2014/main" id="{E9143C11-A42D-42B3-979E-B54EA6584967}"/>
               </a:ext>
             </a:extLst>
           </p:cNvPr>
@@ -10656,7 +10656,7 @@
           <p:cNvPr id="10" name="">
             <a:extLst xmlns:a="http://schemas.openxmlformats.org/drawingml/2006/main">
               <a:ext uri="{FF2B5EF4-FFF2-40B4-BE49-F238E27FC236}">
-                <a16:creationId xmlns:a16="http://schemas.microsoft.com/office/drawing/2014/main" id="{7539A315-8B67-44DD-9717-85E87C218360}"/>
+                <a16:creationId xmlns:a16="http://schemas.microsoft.com/office/drawing/2014/main" id="{6C17CD99-46DE-4714-BFD3-9B2B9C583B9E}"/>
               </a:ext>
             </a:extLst>
           </p:cNvPr>
@@ -10716,7 +10716,7 @@
     </p:spTree>
     <p:extLst>
       <p:ext uri="{BB962C8B-B14F-4D97-AF65-F5344CB8AC3E}">
-        <p14:creationId xmlns:p14="http://schemas.microsoft.com/office/powerpoint/2010/main" val="1791121711"/>
+        <p14:creationId xmlns:p14="http://schemas.microsoft.com/office/powerpoint/2010/main" val="925768718"/>
       </p:ext>
     </p:extLst>
   </p:cSld>
@@ -10747,7 +10747,7 @@
           <p:cNvPr id="4" name="">
             <a:extLst xmlns:a="http://schemas.openxmlformats.org/drawingml/2006/main">
               <a:ext uri="{FF2B5EF4-FFF2-40B4-BE49-F238E27FC236}">
-                <a16:creationId xmlns:a16="http://schemas.microsoft.com/office/drawing/2014/main" id="{6C2A8CB0-9358-48B1-88A2-EF6D23C92165}"/>
+                <a16:creationId xmlns:a16="http://schemas.microsoft.com/office/drawing/2014/main" id="{08B450A4-DFB8-42AA-BC70-F9A98129F252}"/>
               </a:ext>
             </a:extLst>
           </p:cNvPr>
@@ -10809,7 +10809,7 @@
           <p:cNvPr id="2" name="">
             <a:extLst xmlns:a="http://schemas.openxmlformats.org/drawingml/2006/main">
               <a:ext uri="{FF2B5EF4-FFF2-40B4-BE49-F238E27FC236}">
-                <a16:creationId xmlns:a16="http://schemas.microsoft.com/office/drawing/2014/main" id="{4183E58B-A5CD-4944-89AE-0530BD3323DE}"/>
+                <a16:creationId xmlns:a16="http://schemas.microsoft.com/office/drawing/2014/main" id="{8EC7BE6D-D822-4D13-AA3C-121BF3867DE4}"/>
               </a:ext>
             </a:extLst>
           </p:cNvPr>
@@ -10871,7 +10871,7 @@
           <p:cNvPr id="3" name="big-statement">
             <a:extLst xmlns:a="http://schemas.openxmlformats.org/drawingml/2006/main">
               <a:ext uri="{FF2B5EF4-FFF2-40B4-BE49-F238E27FC236}">
-                <a16:creationId xmlns:a16="http://schemas.microsoft.com/office/drawing/2014/main" id="{C9E7DD27-D52F-465A-ACC7-845A383B4277}"/>
+                <a16:creationId xmlns:a16="http://schemas.microsoft.com/office/drawing/2014/main" id="{1A2AC90F-2929-46F5-8DC5-65EC57042131}"/>
               </a:ext>
             </a:extLst>
           </p:cNvPr>
@@ -10931,7 +10931,7 @@
     </p:spTree>
     <p:extLst>
       <p:ext uri="{BB962C8B-B14F-4D97-AF65-F5344CB8AC3E}">
-        <p14:creationId xmlns:p14="http://schemas.microsoft.com/office/powerpoint/2010/main" val="289080066"/>
+        <p14:creationId xmlns:p14="http://schemas.microsoft.com/office/powerpoint/2010/main" val="1614634615"/>
       </p:ext>
     </p:extLst>
   </p:cSld>
@@ -10962,7 +10962,7 @@
           <p:cNvPr id="17" name="chapter-label">
             <a:extLst xmlns:a="http://schemas.openxmlformats.org/drawingml/2006/main">
               <a:ext uri="{FF2B5EF4-FFF2-40B4-BE49-F238E27FC236}">
-                <a16:creationId xmlns:a16="http://schemas.microsoft.com/office/drawing/2014/main" id="{5459BEB5-4A91-46F9-A8B3-D3DF8618D134}"/>
+                <a16:creationId xmlns:a16="http://schemas.microsoft.com/office/drawing/2014/main" id="{F56C4DED-9A31-4C26-A39E-9F2567956F6E}"/>
               </a:ext>
             </a:extLst>
           </p:cNvPr>
@@ -11024,7 +11024,7 @@
           <p:cNvPr id="2" name="slide-title">
             <a:extLst xmlns:a="http://schemas.openxmlformats.org/drawingml/2006/main">
               <a:ext uri="{FF2B5EF4-FFF2-40B4-BE49-F238E27FC236}">
-                <a16:creationId xmlns:a16="http://schemas.microsoft.com/office/drawing/2014/main" id="{0BDCE72B-E0E1-463B-8B8C-49CA79BE2BE8}"/>
+                <a16:creationId xmlns:a16="http://schemas.microsoft.com/office/drawing/2014/main" id="{588C9ADC-8731-48CF-880A-D70F96B43978}"/>
               </a:ext>
             </a:extLst>
           </p:cNvPr>
@@ -11086,7 +11086,7 @@
           <p:cNvPr id="3" name="footer-rule">
             <a:extLst xmlns:a="http://schemas.openxmlformats.org/drawingml/2006/main">
               <a:ext uri="{FF2B5EF4-FFF2-40B4-BE49-F238E27FC236}">
-                <a16:creationId xmlns:a16="http://schemas.microsoft.com/office/drawing/2014/main" id="{0B61AE8F-98A4-4CCF-BEED-179A5626EF6C}"/>
+                <a16:creationId xmlns:a16="http://schemas.microsoft.com/office/drawing/2014/main" id="{381E0787-0645-43CB-B6EC-4F89A105398C}"/>
               </a:ext>
             </a:extLst>
           </p:cNvPr>
@@ -11117,7 +11117,7 @@
           <p:cNvPr id="4" name="footer-book">
             <a:extLst xmlns:a="http://schemas.openxmlformats.org/drawingml/2006/main">
               <a:ext uri="{FF2B5EF4-FFF2-40B4-BE49-F238E27FC236}">
-                <a16:creationId xmlns:a16="http://schemas.microsoft.com/office/drawing/2014/main" id="{59108249-46CD-4FD8-A144-01242B634EBB}"/>
+                <a16:creationId xmlns:a16="http://schemas.microsoft.com/office/drawing/2014/main" id="{BF76F871-018B-4859-B9D7-C1E2FA80BB36}"/>
               </a:ext>
             </a:extLst>
           </p:cNvPr>
@@ -11179,7 +11179,7 @@
           <p:cNvPr id="5" name="footer-number">
             <a:extLst xmlns:a="http://schemas.openxmlformats.org/drawingml/2006/main">
               <a:ext uri="{FF2B5EF4-FFF2-40B4-BE49-F238E27FC236}">
-                <a16:creationId xmlns:a16="http://schemas.microsoft.com/office/drawing/2014/main" id="{55F1257D-82EE-45DA-B86A-CDB1EEF2DB25}"/>
+                <a16:creationId xmlns:a16="http://schemas.microsoft.com/office/drawing/2014/main" id="{7221A8DD-D3E9-485D-81A5-51D5F9B9A19A}"/>
               </a:ext>
             </a:extLst>
           </p:cNvPr>
@@ -11241,7 +11241,7 @@
           <p:cNvPr id="6" name="bullet-mark-1">
             <a:extLst xmlns:a="http://schemas.openxmlformats.org/drawingml/2006/main">
               <a:ext uri="{FF2B5EF4-FFF2-40B4-BE49-F238E27FC236}">
-                <a16:creationId xmlns:a16="http://schemas.microsoft.com/office/drawing/2014/main" id="{C32CFC5D-89F8-4A01-9805-B18AE61AC8C4}"/>
+                <a16:creationId xmlns:a16="http://schemas.microsoft.com/office/drawing/2014/main" id="{54A44746-DBF5-48C1-980F-6209793B9382}"/>
               </a:ext>
             </a:extLst>
           </p:cNvPr>
@@ -11303,7 +11303,7 @@
           <p:cNvPr id="7" name="bullet-1">
             <a:extLst xmlns:a="http://schemas.openxmlformats.org/drawingml/2006/main">
               <a:ext uri="{FF2B5EF4-FFF2-40B4-BE49-F238E27FC236}">
-                <a16:creationId xmlns:a16="http://schemas.microsoft.com/office/drawing/2014/main" id="{2AABAB8C-92F7-4339-8905-457B07A85DAC}"/>
+                <a16:creationId xmlns:a16="http://schemas.microsoft.com/office/drawing/2014/main" id="{9FD842C1-1EB4-43B9-8B4C-5E9EDE9E36EE}"/>
               </a:ext>
             </a:extLst>
           </p:cNvPr>
@@ -11365,7 +11365,7 @@
           <p:cNvPr id="8" name="bullet-mark-2">
             <a:extLst xmlns:a="http://schemas.openxmlformats.org/drawingml/2006/main">
               <a:ext uri="{FF2B5EF4-FFF2-40B4-BE49-F238E27FC236}">
-                <a16:creationId xmlns:a16="http://schemas.microsoft.com/office/drawing/2014/main" id="{B19CB6AA-12E8-49EB-8427-34354DFCE551}"/>
+                <a16:creationId xmlns:a16="http://schemas.microsoft.com/office/drawing/2014/main" id="{2070636D-30CA-421A-9D01-43050015358A}"/>
               </a:ext>
             </a:extLst>
           </p:cNvPr>
@@ -11427,7 +11427,7 @@
           <p:cNvPr id="9" name="bullet-2">
             <a:extLst xmlns:a="http://schemas.openxmlformats.org/drawingml/2006/main">
               <a:ext uri="{FF2B5EF4-FFF2-40B4-BE49-F238E27FC236}">
-                <a16:creationId xmlns:a16="http://schemas.microsoft.com/office/drawing/2014/main" id="{854B3863-3D3D-4155-8CF5-A311E72C9983}"/>
+                <a16:creationId xmlns:a16="http://schemas.microsoft.com/office/drawing/2014/main" id="{0ED42DB1-B617-46CD-8072-272DDE9257A1}"/>
               </a:ext>
             </a:extLst>
           </p:cNvPr>
@@ -11489,7 +11489,7 @@
           <p:cNvPr id="10" name="bullet-mark-3">
             <a:extLst xmlns:a="http://schemas.openxmlformats.org/drawingml/2006/main">
               <a:ext uri="{FF2B5EF4-FFF2-40B4-BE49-F238E27FC236}">
-                <a16:creationId xmlns:a16="http://schemas.microsoft.com/office/drawing/2014/main" id="{53445553-F597-4312-AD9B-1F9BA9D61265}"/>
+                <a16:creationId xmlns:a16="http://schemas.microsoft.com/office/drawing/2014/main" id="{6D919BE0-7475-492C-8441-D92D2E34F09F}"/>
               </a:ext>
             </a:extLst>
           </p:cNvPr>
@@ -11551,7 +11551,7 @@
           <p:cNvPr id="11" name="bullet-3">
             <a:extLst xmlns:a="http://schemas.openxmlformats.org/drawingml/2006/main">
               <a:ext uri="{FF2B5EF4-FFF2-40B4-BE49-F238E27FC236}">
-                <a16:creationId xmlns:a16="http://schemas.microsoft.com/office/drawing/2014/main" id="{99587C50-4D00-4360-AA52-7508D0C807B2}"/>
+                <a16:creationId xmlns:a16="http://schemas.microsoft.com/office/drawing/2014/main" id="{16DD9C69-FE47-4B99-B2DE-DD56AEC42138}"/>
               </a:ext>
             </a:extLst>
           </p:cNvPr>
@@ -11613,7 +11613,7 @@
           <p:cNvPr id="12" name="bullet-mark-4">
             <a:extLst xmlns:a="http://schemas.openxmlformats.org/drawingml/2006/main">
               <a:ext uri="{FF2B5EF4-FFF2-40B4-BE49-F238E27FC236}">
-                <a16:creationId xmlns:a16="http://schemas.microsoft.com/office/drawing/2014/main" id="{08DDD83E-7BB4-4E4A-AD81-DA825E08A9BC}"/>
+                <a16:creationId xmlns:a16="http://schemas.microsoft.com/office/drawing/2014/main" id="{ED51647C-2021-45BF-9BED-1DF63C82EA53}"/>
               </a:ext>
             </a:extLst>
           </p:cNvPr>
@@ -11675,7 +11675,7 @@
           <p:cNvPr id="13" name="bullet-4">
             <a:extLst xmlns:a="http://schemas.openxmlformats.org/drawingml/2006/main">
               <a:ext uri="{FF2B5EF4-FFF2-40B4-BE49-F238E27FC236}">
-                <a16:creationId xmlns:a16="http://schemas.microsoft.com/office/drawing/2014/main" id="{6236F2B2-EBD2-452C-8EC9-C0CDBA88CDA6}"/>
+                <a16:creationId xmlns:a16="http://schemas.microsoft.com/office/drawing/2014/main" id="{650BF553-279E-44BA-9120-1675F8FFBD63}"/>
               </a:ext>
             </a:extLst>
           </p:cNvPr>
@@ -11737,7 +11737,7 @@
           <p:cNvPr id="14" name="bullet-mark-5">
             <a:extLst xmlns:a="http://schemas.openxmlformats.org/drawingml/2006/main">
               <a:ext uri="{FF2B5EF4-FFF2-40B4-BE49-F238E27FC236}">
-                <a16:creationId xmlns:a16="http://schemas.microsoft.com/office/drawing/2014/main" id="{46F8E2B7-1AAF-48FC-A625-19EC46F1C654}"/>
+                <a16:creationId xmlns:a16="http://schemas.microsoft.com/office/drawing/2014/main" id="{EAAC520B-6AE8-418E-BD79-9F417039F8A4}"/>
               </a:ext>
             </a:extLst>
           </p:cNvPr>
@@ -11799,7 +11799,7 @@
           <p:cNvPr id="15" name="bullet-5">
             <a:extLst xmlns:a="http://schemas.openxmlformats.org/drawingml/2006/main">
               <a:ext uri="{FF2B5EF4-FFF2-40B4-BE49-F238E27FC236}">
-                <a16:creationId xmlns:a16="http://schemas.microsoft.com/office/drawing/2014/main" id="{2636931C-3613-4FB8-A81B-BCA6D2C56BF0}"/>
+                <a16:creationId xmlns:a16="http://schemas.microsoft.com/office/drawing/2014/main" id="{4FC30AC0-9A0F-477B-B28E-B1F7506087C6}"/>
               </a:ext>
             </a:extLst>
           </p:cNvPr>
@@ -11861,7 +11861,7 @@
           <p:cNvPr id="16" name="">
             <a:extLst xmlns:a="http://schemas.openxmlformats.org/drawingml/2006/main">
               <a:ext uri="{FF2B5EF4-FFF2-40B4-BE49-F238E27FC236}">
-                <a16:creationId xmlns:a16="http://schemas.microsoft.com/office/drawing/2014/main" id="{BC41477C-C37B-48B3-AA44-5AD5DEEFAC38}"/>
+                <a16:creationId xmlns:a16="http://schemas.microsoft.com/office/drawing/2014/main" id="{ACAAACDE-F001-4B9A-BDBF-532AE3C94073}"/>
               </a:ext>
             </a:extLst>
           </p:cNvPr>
@@ -11921,7 +11921,7 @@
     </p:spTree>
     <p:extLst>
       <p:ext uri="{BB962C8B-B14F-4D97-AF65-F5344CB8AC3E}">
-        <p14:creationId xmlns:p14="http://schemas.microsoft.com/office/powerpoint/2010/main" val="1225276962"/>
+        <p14:creationId xmlns:p14="http://schemas.microsoft.com/office/powerpoint/2010/main" val="147648325"/>
       </p:ext>
     </p:extLst>
   </p:cSld>
@@ -11952,7 +11952,7 @@
           <p:cNvPr id="15" name="chapter-label">
             <a:extLst xmlns:a="http://schemas.openxmlformats.org/drawingml/2006/main">
               <a:ext uri="{FF2B5EF4-FFF2-40B4-BE49-F238E27FC236}">
-                <a16:creationId xmlns:a16="http://schemas.microsoft.com/office/drawing/2014/main" id="{6BAA52A4-56AB-47C8-BAD8-85C8747C3143}"/>
+                <a16:creationId xmlns:a16="http://schemas.microsoft.com/office/drawing/2014/main" id="{19547A3D-C107-4487-8BFC-B94BC62A4E06}"/>
               </a:ext>
             </a:extLst>
           </p:cNvPr>
@@ -12014,7 +12014,7 @@
           <p:cNvPr id="2" name="slide-title">
             <a:extLst xmlns:a="http://schemas.openxmlformats.org/drawingml/2006/main">
               <a:ext uri="{FF2B5EF4-FFF2-40B4-BE49-F238E27FC236}">
-                <a16:creationId xmlns:a16="http://schemas.microsoft.com/office/drawing/2014/main" id="{F1F9E55E-0BF1-48D1-89D6-4756EEBE8764}"/>
+                <a16:creationId xmlns:a16="http://schemas.microsoft.com/office/drawing/2014/main" id="{2DB9220F-DBC5-4953-889E-65095F0C286C}"/>
               </a:ext>
             </a:extLst>
           </p:cNvPr>
@@ -12076,7 +12076,7 @@
           <p:cNvPr id="3" name="footer-rule">
             <a:extLst xmlns:a="http://schemas.openxmlformats.org/drawingml/2006/main">
               <a:ext uri="{FF2B5EF4-FFF2-40B4-BE49-F238E27FC236}">
-                <a16:creationId xmlns:a16="http://schemas.microsoft.com/office/drawing/2014/main" id="{810802EF-5C56-4655-A0B6-E0A90CEC8C2B}"/>
+                <a16:creationId xmlns:a16="http://schemas.microsoft.com/office/drawing/2014/main" id="{25AAE608-774F-48A5-91ED-DD3C50949090}"/>
               </a:ext>
             </a:extLst>
           </p:cNvPr>
@@ -12107,7 +12107,7 @@
           <p:cNvPr id="4" name="footer-book">
             <a:extLst xmlns:a="http://schemas.openxmlformats.org/drawingml/2006/main">
               <a:ext uri="{FF2B5EF4-FFF2-40B4-BE49-F238E27FC236}">
-                <a16:creationId xmlns:a16="http://schemas.microsoft.com/office/drawing/2014/main" id="{4C634ADB-F1AD-4AC5-B215-E3FD0E1FA2AC}"/>
+                <a16:creationId xmlns:a16="http://schemas.microsoft.com/office/drawing/2014/main" id="{BA7D1450-DB27-4AE3-BA63-A730BF963894}"/>
               </a:ext>
             </a:extLst>
           </p:cNvPr>
@@ -12169,7 +12169,7 @@
           <p:cNvPr id="5" name="footer-number">
             <a:extLst xmlns:a="http://schemas.openxmlformats.org/drawingml/2006/main">
               <a:ext uri="{FF2B5EF4-FFF2-40B4-BE49-F238E27FC236}">
-                <a16:creationId xmlns:a16="http://schemas.microsoft.com/office/drawing/2014/main" id="{CD8E804F-E4AA-4E5D-A4C3-F3FBBA9BC104}"/>
+                <a16:creationId xmlns:a16="http://schemas.microsoft.com/office/drawing/2014/main" id="{675DB41F-9789-4583-80BF-A480ECE33014}"/>
               </a:ext>
             </a:extLst>
           </p:cNvPr>
@@ -12231,7 +12231,7 @@
           <p:cNvPr id="6" name="panel-1">
             <a:extLst xmlns:a="http://schemas.openxmlformats.org/drawingml/2006/main">
               <a:ext uri="{FF2B5EF4-FFF2-40B4-BE49-F238E27FC236}">
-                <a16:creationId xmlns:a16="http://schemas.microsoft.com/office/drawing/2014/main" id="{E71A9B84-FF41-4A13-A7C7-0DE868E2A3A4}"/>
+                <a16:creationId xmlns:a16="http://schemas.microsoft.com/office/drawing/2014/main" id="{4C6DDA6A-E82B-4784-B76D-157AE401FCDD}"/>
               </a:ext>
             </a:extLst>
           </p:cNvPr>
@@ -12264,7 +12264,7 @@
           <p:cNvPr id="7" name="">
             <a:extLst xmlns:a="http://schemas.openxmlformats.org/drawingml/2006/main">
               <a:ext uri="{FF2B5EF4-FFF2-40B4-BE49-F238E27FC236}">
-                <a16:creationId xmlns:a16="http://schemas.microsoft.com/office/drawing/2014/main" id="{2516B66C-4727-40BC-AB3B-CAA06168E745}"/>
+                <a16:creationId xmlns:a16="http://schemas.microsoft.com/office/drawing/2014/main" id="{94056F15-AF27-4842-BCC2-1D2B186075E0}"/>
               </a:ext>
             </a:extLst>
           </p:cNvPr>
@@ -12326,7 +12326,7 @@
           <p:cNvPr id="8" name="">
             <a:extLst xmlns:a="http://schemas.openxmlformats.org/drawingml/2006/main">
               <a:ext uri="{FF2B5EF4-FFF2-40B4-BE49-F238E27FC236}">
-                <a16:creationId xmlns:a16="http://schemas.microsoft.com/office/drawing/2014/main" id="{221C4B25-5977-4A0A-9112-FAF4D12D3C46}"/>
+                <a16:creationId xmlns:a16="http://schemas.microsoft.com/office/drawing/2014/main" id="{81434FEA-416E-45F1-A3C6-4E7E253F8E8A}"/>
               </a:ext>
             </a:extLst>
           </p:cNvPr>
@@ -12388,7 +12388,7 @@
           <p:cNvPr id="9" name="">
             <a:extLst xmlns:a="http://schemas.openxmlformats.org/drawingml/2006/main">
               <a:ext uri="{FF2B5EF4-FFF2-40B4-BE49-F238E27FC236}">
-                <a16:creationId xmlns:a16="http://schemas.microsoft.com/office/drawing/2014/main" id="{D9753621-307E-481D-B3AB-9A6B58985474}"/>
+                <a16:creationId xmlns:a16="http://schemas.microsoft.com/office/drawing/2014/main" id="{F2B8AB6A-2A8C-416D-A2C1-34FACB9CE551}"/>
               </a:ext>
             </a:extLst>
           </p:cNvPr>
@@ -12450,7 +12450,7 @@
           <p:cNvPr id="10" name="panel-2">
             <a:extLst xmlns:a="http://schemas.openxmlformats.org/drawingml/2006/main">
               <a:ext uri="{FF2B5EF4-FFF2-40B4-BE49-F238E27FC236}">
-                <a16:creationId xmlns:a16="http://schemas.microsoft.com/office/drawing/2014/main" id="{62E64143-A936-4133-A0A1-44A277217FAD}"/>
+                <a16:creationId xmlns:a16="http://schemas.microsoft.com/office/drawing/2014/main" id="{4D67CAF7-D35E-49CC-8D02-F22192AFE171}"/>
               </a:ext>
             </a:extLst>
           </p:cNvPr>
@@ -12483,7 +12483,7 @@
           <p:cNvPr id="11" name="">
             <a:extLst xmlns:a="http://schemas.openxmlformats.org/drawingml/2006/main">
               <a:ext uri="{FF2B5EF4-FFF2-40B4-BE49-F238E27FC236}">
-                <a16:creationId xmlns:a16="http://schemas.microsoft.com/office/drawing/2014/main" id="{B7FE7F0C-4063-4D57-A5D0-FD8501EB8C8B}"/>
+                <a16:creationId xmlns:a16="http://schemas.microsoft.com/office/drawing/2014/main" id="{07273B10-F67C-40D5-A283-31756A541AA5}"/>
               </a:ext>
             </a:extLst>
           </p:cNvPr>
@@ -12545,7 +12545,7 @@
           <p:cNvPr id="12" name="">
             <a:extLst xmlns:a="http://schemas.openxmlformats.org/drawingml/2006/main">
               <a:ext uri="{FF2B5EF4-FFF2-40B4-BE49-F238E27FC236}">
-                <a16:creationId xmlns:a16="http://schemas.microsoft.com/office/drawing/2014/main" id="{E68B324A-6217-4D11-AC10-AED25207D07C}"/>
+                <a16:creationId xmlns:a16="http://schemas.microsoft.com/office/drawing/2014/main" id="{7BCEFBAF-56D2-401F-9962-4C991B4E984C}"/>
               </a:ext>
             </a:extLst>
           </p:cNvPr>
@@ -12607,7 +12607,7 @@
           <p:cNvPr id="13" name="">
             <a:extLst xmlns:a="http://schemas.openxmlformats.org/drawingml/2006/main">
               <a:ext uri="{FF2B5EF4-FFF2-40B4-BE49-F238E27FC236}">
-                <a16:creationId xmlns:a16="http://schemas.microsoft.com/office/drawing/2014/main" id="{C4017E84-C22A-4D52-9508-FF48B574BD6A}"/>
+                <a16:creationId xmlns:a16="http://schemas.microsoft.com/office/drawing/2014/main" id="{823C967C-BAF7-488E-81D9-5CD2BF85D104}"/>
               </a:ext>
             </a:extLst>
           </p:cNvPr>
@@ -12669,7 +12669,7 @@
           <p:cNvPr id="14" name="">
             <a:extLst xmlns:a="http://schemas.openxmlformats.org/drawingml/2006/main">
               <a:ext uri="{FF2B5EF4-FFF2-40B4-BE49-F238E27FC236}">
-                <a16:creationId xmlns:a16="http://schemas.microsoft.com/office/drawing/2014/main" id="{FFF48926-CAFD-43F4-BCC3-420DAD952EEE}"/>
+                <a16:creationId xmlns:a16="http://schemas.microsoft.com/office/drawing/2014/main" id="{F9BF9614-8AED-4927-A757-77FA4A586551}"/>
               </a:ext>
             </a:extLst>
           </p:cNvPr>
@@ -12729,7 +12729,7 @@
     </p:spTree>
     <p:extLst>
       <p:ext uri="{BB962C8B-B14F-4D97-AF65-F5344CB8AC3E}">
-        <p14:creationId xmlns:p14="http://schemas.microsoft.com/office/powerpoint/2010/main" val="1911112274"/>
+        <p14:creationId xmlns:p14="http://schemas.microsoft.com/office/powerpoint/2010/main" val="1426665851"/>
       </p:ext>
     </p:extLst>
   </p:cSld>
@@ -12760,7 +12760,7 @@
           <p:cNvPr id="18" name="chapter-label">
             <a:extLst xmlns:a="http://schemas.openxmlformats.org/drawingml/2006/main">
               <a:ext uri="{FF2B5EF4-FFF2-40B4-BE49-F238E27FC236}">
-                <a16:creationId xmlns:a16="http://schemas.microsoft.com/office/drawing/2014/main" id="{6F333951-F2A1-4AB7-8CB1-C0B3C803A830}"/>
+                <a16:creationId xmlns:a16="http://schemas.microsoft.com/office/drawing/2014/main" id="{512FE7B3-695F-4967-8445-13FDF43CB549}"/>
               </a:ext>
             </a:extLst>
           </p:cNvPr>
@@ -12822,7 +12822,7 @@
           <p:cNvPr id="2" name="slide-title">
             <a:extLst xmlns:a="http://schemas.openxmlformats.org/drawingml/2006/main">
               <a:ext uri="{FF2B5EF4-FFF2-40B4-BE49-F238E27FC236}">
-                <a16:creationId xmlns:a16="http://schemas.microsoft.com/office/drawing/2014/main" id="{0FDA68E8-2285-49C4-B5F1-E43CFB870752}"/>
+                <a16:creationId xmlns:a16="http://schemas.microsoft.com/office/drawing/2014/main" id="{EF5F689B-B51C-4C41-B242-9C6FB5CBD398}"/>
               </a:ext>
             </a:extLst>
           </p:cNvPr>
@@ -12884,7 +12884,7 @@
           <p:cNvPr id="3" name="footer-rule">
             <a:extLst xmlns:a="http://schemas.openxmlformats.org/drawingml/2006/main">
               <a:ext uri="{FF2B5EF4-FFF2-40B4-BE49-F238E27FC236}">
-                <a16:creationId xmlns:a16="http://schemas.microsoft.com/office/drawing/2014/main" id="{D0BDEF35-E3AF-4C29-9FE4-C580B5C3E1D2}"/>
+                <a16:creationId xmlns:a16="http://schemas.microsoft.com/office/drawing/2014/main" id="{1285AD2B-D9AF-4035-9058-CB6CCC96B1F4}"/>
               </a:ext>
             </a:extLst>
           </p:cNvPr>
@@ -12915,7 +12915,7 @@
           <p:cNvPr id="4" name="footer-book">
             <a:extLst xmlns:a="http://schemas.openxmlformats.org/drawingml/2006/main">
               <a:ext uri="{FF2B5EF4-FFF2-40B4-BE49-F238E27FC236}">
-                <a16:creationId xmlns:a16="http://schemas.microsoft.com/office/drawing/2014/main" id="{FE08A110-E356-4872-8035-65626867B717}"/>
+                <a16:creationId xmlns:a16="http://schemas.microsoft.com/office/drawing/2014/main" id="{FB034CE0-5DF1-4D80-9842-FEA7840D5890}"/>
               </a:ext>
             </a:extLst>
           </p:cNvPr>
@@ -12977,7 +12977,7 @@
           <p:cNvPr id="5" name="footer-number">
             <a:extLst xmlns:a="http://schemas.openxmlformats.org/drawingml/2006/main">
               <a:ext uri="{FF2B5EF4-FFF2-40B4-BE49-F238E27FC236}">
-                <a16:creationId xmlns:a16="http://schemas.microsoft.com/office/drawing/2014/main" id="{D23516D8-A76E-40E0-8482-5E5B51388312}"/>
+                <a16:creationId xmlns:a16="http://schemas.microsoft.com/office/drawing/2014/main" id="{F4A6D13C-0F44-4D84-8D0B-772DA61C238D}"/>
               </a:ext>
             </a:extLst>
           </p:cNvPr>
@@ -13039,7 +13039,7 @@
           <p:cNvPr id="6" name="">
             <a:extLst xmlns:a="http://schemas.openxmlformats.org/drawingml/2006/main">
               <a:ext uri="{FF2B5EF4-FFF2-40B4-BE49-F238E27FC236}">
-                <a16:creationId xmlns:a16="http://schemas.microsoft.com/office/drawing/2014/main" id="{0A90B63C-63C9-44AB-B0E7-4103C65A948B}"/>
+                <a16:creationId xmlns:a16="http://schemas.microsoft.com/office/drawing/2014/main" id="{96CDDA60-86E6-498B-92AB-1A76DC570E58}"/>
               </a:ext>
             </a:extLst>
           </p:cNvPr>
@@ -13101,7 +13101,7 @@
           <p:cNvPr id="7" name="bullet-mark-1">
             <a:extLst xmlns:a="http://schemas.openxmlformats.org/drawingml/2006/main">
               <a:ext uri="{FF2B5EF4-FFF2-40B4-BE49-F238E27FC236}">
-                <a16:creationId xmlns:a16="http://schemas.microsoft.com/office/drawing/2014/main" id="{F4DF794B-2360-4B7C-92E4-CE6AC92B7DFF}"/>
+                <a16:creationId xmlns:a16="http://schemas.microsoft.com/office/drawing/2014/main" id="{63353184-6DCA-4FC6-B33B-6B72562F638C}"/>
               </a:ext>
             </a:extLst>
           </p:cNvPr>
@@ -13163,7 +13163,7 @@
           <p:cNvPr id="8" name="bullet-1">
             <a:extLst xmlns:a="http://schemas.openxmlformats.org/drawingml/2006/main">
               <a:ext uri="{FF2B5EF4-FFF2-40B4-BE49-F238E27FC236}">
-                <a16:creationId xmlns:a16="http://schemas.microsoft.com/office/drawing/2014/main" id="{28BD8B93-E7A5-413D-B761-C26468083DA5}"/>
+                <a16:creationId xmlns:a16="http://schemas.microsoft.com/office/drawing/2014/main" id="{48D761E7-12C0-47CB-972B-392B281ED5D3}"/>
               </a:ext>
             </a:extLst>
           </p:cNvPr>
@@ -13225,7 +13225,7 @@
           <p:cNvPr id="9" name="bullet-mark-2">
             <a:extLst xmlns:a="http://schemas.openxmlformats.org/drawingml/2006/main">
               <a:ext uri="{FF2B5EF4-FFF2-40B4-BE49-F238E27FC236}">
-                <a16:creationId xmlns:a16="http://schemas.microsoft.com/office/drawing/2014/main" id="{AE13748A-3B64-4512-91A8-A2470309C4E4}"/>
+                <a16:creationId xmlns:a16="http://schemas.microsoft.com/office/drawing/2014/main" id="{56C074D5-FD91-4B76-BBB4-5F520EB5E02C}"/>
               </a:ext>
             </a:extLst>
           </p:cNvPr>
@@ -13287,7 +13287,7 @@
           <p:cNvPr id="10" name="bullet-2">
             <a:extLst xmlns:a="http://schemas.openxmlformats.org/drawingml/2006/main">
               <a:ext uri="{FF2B5EF4-FFF2-40B4-BE49-F238E27FC236}">
-                <a16:creationId xmlns:a16="http://schemas.microsoft.com/office/drawing/2014/main" id="{11CC7160-52E7-4C7F-B389-6724951A3B22}"/>
+                <a16:creationId xmlns:a16="http://schemas.microsoft.com/office/drawing/2014/main" id="{5E4F7BB4-9EC4-4E6B-9DFD-3A440D83F5F2}"/>
               </a:ext>
             </a:extLst>
           </p:cNvPr>
@@ -13349,7 +13349,7 @@
           <p:cNvPr id="11" name="bullet-mark-3">
             <a:extLst xmlns:a="http://schemas.openxmlformats.org/drawingml/2006/main">
               <a:ext uri="{FF2B5EF4-FFF2-40B4-BE49-F238E27FC236}">
-                <a16:creationId xmlns:a16="http://schemas.microsoft.com/office/drawing/2014/main" id="{59981010-D162-424B-960C-091DB4B716EE}"/>
+                <a16:creationId xmlns:a16="http://schemas.microsoft.com/office/drawing/2014/main" id="{AB389203-35BF-4A36-B60C-A0571E368FCE}"/>
               </a:ext>
             </a:extLst>
           </p:cNvPr>
@@ -13411,7 +13411,7 @@
           <p:cNvPr id="12" name="bullet-3">
             <a:extLst xmlns:a="http://schemas.openxmlformats.org/drawingml/2006/main">
               <a:ext uri="{FF2B5EF4-FFF2-40B4-BE49-F238E27FC236}">
-                <a16:creationId xmlns:a16="http://schemas.microsoft.com/office/drawing/2014/main" id="{BF6ABF39-F8A2-4DF7-8552-4334F0F225C4}"/>
+                <a16:creationId xmlns:a16="http://schemas.microsoft.com/office/drawing/2014/main" id="{5D23755E-D2BD-4C5F-81CC-1D0E187DD41C}"/>
               </a:ext>
             </a:extLst>
           </p:cNvPr>
@@ -13473,7 +13473,7 @@
           <p:cNvPr id="13" name="bullet-mark-4">
             <a:extLst xmlns:a="http://schemas.openxmlformats.org/drawingml/2006/main">
               <a:ext uri="{FF2B5EF4-FFF2-40B4-BE49-F238E27FC236}">
-                <a16:creationId xmlns:a16="http://schemas.microsoft.com/office/drawing/2014/main" id="{D67CFDEB-1996-4382-BC73-19C842688B05}"/>
+                <a16:creationId xmlns:a16="http://schemas.microsoft.com/office/drawing/2014/main" id="{2AB183F3-22DE-4CA6-B817-C51E756A9084}"/>
               </a:ext>
             </a:extLst>
           </p:cNvPr>
@@ -13535,7 +13535,7 @@
           <p:cNvPr id="14" name="bullet-4">
             <a:extLst xmlns:a="http://schemas.openxmlformats.org/drawingml/2006/main">
               <a:ext uri="{FF2B5EF4-FFF2-40B4-BE49-F238E27FC236}">
-                <a16:creationId xmlns:a16="http://schemas.microsoft.com/office/drawing/2014/main" id="{2A03C1E3-AB4A-4BDD-BA7D-65502E5F156D}"/>
+                <a16:creationId xmlns:a16="http://schemas.microsoft.com/office/drawing/2014/main" id="{63A0392C-F01D-4B2E-B57B-F28AFD6B0118}"/>
               </a:ext>
             </a:extLst>
           </p:cNvPr>
@@ -13597,7 +13597,7 @@
           <p:cNvPr id="15" name="bullet-mark-5">
             <a:extLst xmlns:a="http://schemas.openxmlformats.org/drawingml/2006/main">
               <a:ext uri="{FF2B5EF4-FFF2-40B4-BE49-F238E27FC236}">
-                <a16:creationId xmlns:a16="http://schemas.microsoft.com/office/drawing/2014/main" id="{51B5A3C4-68AE-465F-ADCF-82F9633E6EFF}"/>
+                <a16:creationId xmlns:a16="http://schemas.microsoft.com/office/drawing/2014/main" id="{97BAA6E1-73B0-4A4C-ADBD-CAB54F5E4BD2}"/>
               </a:ext>
             </a:extLst>
           </p:cNvPr>
@@ -13659,7 +13659,7 @@
           <p:cNvPr id="16" name="bullet-5">
             <a:extLst xmlns:a="http://schemas.openxmlformats.org/drawingml/2006/main">
               <a:ext uri="{FF2B5EF4-FFF2-40B4-BE49-F238E27FC236}">
-                <a16:creationId xmlns:a16="http://schemas.microsoft.com/office/drawing/2014/main" id="{993D0A1B-F737-4E2E-9FF4-BCB2F58D4B70}"/>
+                <a16:creationId xmlns:a16="http://schemas.microsoft.com/office/drawing/2014/main" id="{1AE6D17D-1A0F-45D1-A16F-BCC964DB46A2}"/>
               </a:ext>
             </a:extLst>
           </p:cNvPr>
@@ -13721,7 +13721,7 @@
           <p:cNvPr id="17" name="">
             <a:extLst xmlns:a="http://schemas.openxmlformats.org/drawingml/2006/main">
               <a:ext uri="{FF2B5EF4-FFF2-40B4-BE49-F238E27FC236}">
-                <a16:creationId xmlns:a16="http://schemas.microsoft.com/office/drawing/2014/main" id="{3DA1918C-DEE7-4221-A1A0-24A17BDBA067}"/>
+                <a16:creationId xmlns:a16="http://schemas.microsoft.com/office/drawing/2014/main" id="{96B7EC9D-5A79-4E3C-A0C3-AB9DA40D74EA}"/>
               </a:ext>
             </a:extLst>
           </p:cNvPr>
@@ -13781,7 +13781,7 @@
     </p:spTree>
     <p:extLst>
       <p:ext uri="{BB962C8B-B14F-4D97-AF65-F5344CB8AC3E}">
-        <p14:creationId xmlns:p14="http://schemas.microsoft.com/office/powerpoint/2010/main" val="1767524514"/>
+        <p14:creationId xmlns:p14="http://schemas.microsoft.com/office/powerpoint/2010/main" val="806635739"/>
       </p:ext>
     </p:extLst>
   </p:cSld>
@@ -13812,7 +13812,7 @@
           <p:cNvPr id="8" name="chapter-label">
             <a:extLst xmlns:a="http://schemas.openxmlformats.org/drawingml/2006/main">
               <a:ext uri="{FF2B5EF4-FFF2-40B4-BE49-F238E27FC236}">
-                <a16:creationId xmlns:a16="http://schemas.microsoft.com/office/drawing/2014/main" id="{75624CD4-1F9F-4610-B75D-390EF4A42206}"/>
+                <a16:creationId xmlns:a16="http://schemas.microsoft.com/office/drawing/2014/main" id="{6F1CD557-4E0C-4151-B006-F3B965A92F00}"/>
               </a:ext>
             </a:extLst>
           </p:cNvPr>
@@ -13874,7 +13874,7 @@
           <p:cNvPr id="2" name="slide-title">
             <a:extLst xmlns:a="http://schemas.openxmlformats.org/drawingml/2006/main">
               <a:ext uri="{FF2B5EF4-FFF2-40B4-BE49-F238E27FC236}">
-                <a16:creationId xmlns:a16="http://schemas.microsoft.com/office/drawing/2014/main" id="{3B716F38-8751-43CB-A65C-2B29831D8F85}"/>
+                <a16:creationId xmlns:a16="http://schemas.microsoft.com/office/drawing/2014/main" id="{F3427D91-22A9-467A-BECD-D479852B9DEE}"/>
               </a:ext>
             </a:extLst>
           </p:cNvPr>
@@ -13936,7 +13936,7 @@
           <p:cNvPr id="3" name="footer-rule">
             <a:extLst xmlns:a="http://schemas.openxmlformats.org/drawingml/2006/main">
               <a:ext uri="{FF2B5EF4-FFF2-40B4-BE49-F238E27FC236}">
-                <a16:creationId xmlns:a16="http://schemas.microsoft.com/office/drawing/2014/main" id="{B80EA17E-4AD9-4E87-80AF-7049E26E59D0}"/>
+                <a16:creationId xmlns:a16="http://schemas.microsoft.com/office/drawing/2014/main" id="{9F400429-FCF1-4199-BED4-78A013DD71E1}"/>
               </a:ext>
             </a:extLst>
           </p:cNvPr>
@@ -13967,7 +13967,7 @@
           <p:cNvPr id="4" name="footer-book">
             <a:extLst xmlns:a="http://schemas.openxmlformats.org/drawingml/2006/main">
               <a:ext uri="{FF2B5EF4-FFF2-40B4-BE49-F238E27FC236}">
-                <a16:creationId xmlns:a16="http://schemas.microsoft.com/office/drawing/2014/main" id="{1CA53BB2-73C5-42CC-926D-FE88313AF2D5}"/>
+                <a16:creationId xmlns:a16="http://schemas.microsoft.com/office/drawing/2014/main" id="{6230DE23-694B-4D9F-B7B3-D5B1CAEE456E}"/>
               </a:ext>
             </a:extLst>
           </p:cNvPr>
@@ -14029,7 +14029,7 @@
           <p:cNvPr id="5" name="footer-number">
             <a:extLst xmlns:a="http://schemas.openxmlformats.org/drawingml/2006/main">
               <a:ext uri="{FF2B5EF4-FFF2-40B4-BE49-F238E27FC236}">
-                <a16:creationId xmlns:a16="http://schemas.microsoft.com/office/drawing/2014/main" id="{D4683756-B7B5-486C-AC91-61BC5B19900D}"/>
+                <a16:creationId xmlns:a16="http://schemas.microsoft.com/office/drawing/2014/main" id="{0AD8CD9B-47BD-4DE9-A94D-783F3A65A398}"/>
               </a:ext>
             </a:extLst>
           </p:cNvPr>
@@ -14095,7 +14095,7 @@
           <p:nvPr/>
         </p:nvPicPr>
         <p:blipFill>
-          <a:blip xmlns:r="http://schemas.openxmlformats.org/officeDocument/2006/relationships" xmlns:a="http://schemas.openxmlformats.org/drawingml/2006/main" r:embed="Rc68d34559a044110"/>
+          <a:blip xmlns:r="http://schemas.openxmlformats.org/officeDocument/2006/relationships" xmlns:a="http://schemas.openxmlformats.org/drawingml/2006/main" r:embed="R72de4c16ea914fef"/>
           <a:stretch xmlns:a="http://schemas.openxmlformats.org/drawingml/2006/main"/>
         </p:blipFill>
         <p:spPr>
@@ -14113,7 +14113,7 @@
           <p:cNvPr id="7" name="">
             <a:extLst xmlns:a="http://schemas.openxmlformats.org/drawingml/2006/main">
               <a:ext uri="{FF2B5EF4-FFF2-40B4-BE49-F238E27FC236}">
-                <a16:creationId xmlns:a16="http://schemas.microsoft.com/office/drawing/2014/main" id="{C4571668-355D-4288-B4E8-43972DE52BD7}"/>
+                <a16:creationId xmlns:a16="http://schemas.microsoft.com/office/drawing/2014/main" id="{3A1FF201-9F3C-4BB9-A57B-4215AE6000ED}"/>
               </a:ext>
             </a:extLst>
           </p:cNvPr>
@@ -14173,7 +14173,7 @@
     </p:spTree>
     <p:extLst>
       <p:ext uri="{BB962C8B-B14F-4D97-AF65-F5344CB8AC3E}">
-        <p14:creationId xmlns:p14="http://schemas.microsoft.com/office/powerpoint/2010/main" val="1257552035"/>
+        <p14:creationId xmlns:p14="http://schemas.microsoft.com/office/powerpoint/2010/main" val="820627115"/>
       </p:ext>
     </p:extLst>
   </p:cSld>
@@ -14204,7 +14204,7 @@
           <p:cNvPr id="18" name="chapter-label">
             <a:extLst xmlns:a="http://schemas.openxmlformats.org/drawingml/2006/main">
               <a:ext uri="{FF2B5EF4-FFF2-40B4-BE49-F238E27FC236}">
-                <a16:creationId xmlns:a16="http://schemas.microsoft.com/office/drawing/2014/main" id="{8E629443-9AF9-47D3-B9EA-F6C8FFA58435}"/>
+                <a16:creationId xmlns:a16="http://schemas.microsoft.com/office/drawing/2014/main" id="{A95726EB-FBA0-4B72-93F0-815F1410B99A}"/>
               </a:ext>
             </a:extLst>
           </p:cNvPr>
@@ -14266,7 +14266,7 @@
           <p:cNvPr id="2" name="slide-title">
             <a:extLst xmlns:a="http://schemas.openxmlformats.org/drawingml/2006/main">
               <a:ext uri="{FF2B5EF4-FFF2-40B4-BE49-F238E27FC236}">
-                <a16:creationId xmlns:a16="http://schemas.microsoft.com/office/drawing/2014/main" id="{AB9D9660-3EE5-4F04-B515-AA0E46568C7A}"/>
+                <a16:creationId xmlns:a16="http://schemas.microsoft.com/office/drawing/2014/main" id="{DAEC4A9C-7AD5-4DF2-BCC8-D581758048CF}"/>
               </a:ext>
             </a:extLst>
           </p:cNvPr>
@@ -14328,7 +14328,7 @@
           <p:cNvPr id="3" name="footer-rule">
             <a:extLst xmlns:a="http://schemas.openxmlformats.org/drawingml/2006/main">
               <a:ext uri="{FF2B5EF4-FFF2-40B4-BE49-F238E27FC236}">
-                <a16:creationId xmlns:a16="http://schemas.microsoft.com/office/drawing/2014/main" id="{6377E5E6-378E-4F5A-959E-061F7CD44E2F}"/>
+                <a16:creationId xmlns:a16="http://schemas.microsoft.com/office/drawing/2014/main" id="{37E7F742-6504-4E31-A44F-888599D906FF}"/>
               </a:ext>
             </a:extLst>
           </p:cNvPr>
@@ -14359,7 +14359,7 @@
           <p:cNvPr id="4" name="footer-book">
             <a:extLst xmlns:a="http://schemas.openxmlformats.org/drawingml/2006/main">
               <a:ext uri="{FF2B5EF4-FFF2-40B4-BE49-F238E27FC236}">
-                <a16:creationId xmlns:a16="http://schemas.microsoft.com/office/drawing/2014/main" id="{F42BB69A-AA14-4186-9E7A-620BBA475C13}"/>
+                <a16:creationId xmlns:a16="http://schemas.microsoft.com/office/drawing/2014/main" id="{DF914DDE-112D-444A-9638-99067FF3C27F}"/>
               </a:ext>
             </a:extLst>
           </p:cNvPr>
@@ -14421,7 +14421,7 @@
           <p:cNvPr id="5" name="footer-number">
             <a:extLst xmlns:a="http://schemas.openxmlformats.org/drawingml/2006/main">
               <a:ext uri="{FF2B5EF4-FFF2-40B4-BE49-F238E27FC236}">
-                <a16:creationId xmlns:a16="http://schemas.microsoft.com/office/drawing/2014/main" id="{8F54A3E6-B624-4ED6-9753-39FDBE5EAAAB}"/>
+                <a16:creationId xmlns:a16="http://schemas.microsoft.com/office/drawing/2014/main" id="{5F0129EF-8ED4-4062-84C2-852345DC8DE5}"/>
               </a:ext>
             </a:extLst>
           </p:cNvPr>
@@ -14483,7 +14483,7 @@
           <p:cNvPr id="6" name="">
             <a:extLst xmlns:a="http://schemas.openxmlformats.org/drawingml/2006/main">
               <a:ext uri="{FF2B5EF4-FFF2-40B4-BE49-F238E27FC236}">
-                <a16:creationId xmlns:a16="http://schemas.microsoft.com/office/drawing/2014/main" id="{6EA04400-5070-447E-8AD7-447A8B2D351D}"/>
+                <a16:creationId xmlns:a16="http://schemas.microsoft.com/office/drawing/2014/main" id="{5B400CB6-6CB1-49D8-9908-05D24B8F9C44}"/>
               </a:ext>
             </a:extLst>
           </p:cNvPr>
@@ -14545,7 +14545,7 @@
           <p:cNvPr id="7" name="bullet-mark-1">
             <a:extLst xmlns:a="http://schemas.openxmlformats.org/drawingml/2006/main">
               <a:ext uri="{FF2B5EF4-FFF2-40B4-BE49-F238E27FC236}">
-                <a16:creationId xmlns:a16="http://schemas.microsoft.com/office/drawing/2014/main" id="{5B16F171-BFF6-4A6D-BD88-8823697AA287}"/>
+                <a16:creationId xmlns:a16="http://schemas.microsoft.com/office/drawing/2014/main" id="{231112DA-3FDB-44FD-946B-3696B25B74A3}"/>
               </a:ext>
             </a:extLst>
           </p:cNvPr>
@@ -14607,7 +14607,7 @@
           <p:cNvPr id="8" name="bullet-1">
             <a:extLst xmlns:a="http://schemas.openxmlformats.org/drawingml/2006/main">
               <a:ext uri="{FF2B5EF4-FFF2-40B4-BE49-F238E27FC236}">
-                <a16:creationId xmlns:a16="http://schemas.microsoft.com/office/drawing/2014/main" id="{0A076D77-8CD9-4D4B-80FF-F0E990F0253B}"/>
+                <a16:creationId xmlns:a16="http://schemas.microsoft.com/office/drawing/2014/main" id="{4970A0F2-7BD4-4A66-ABAC-E1A947DC08E4}"/>
               </a:ext>
             </a:extLst>
           </p:cNvPr>
@@ -14669,7 +14669,7 @@
           <p:cNvPr id="9" name="bullet-mark-2">
             <a:extLst xmlns:a="http://schemas.openxmlformats.org/drawingml/2006/main">
               <a:ext uri="{FF2B5EF4-FFF2-40B4-BE49-F238E27FC236}">
-                <a16:creationId xmlns:a16="http://schemas.microsoft.com/office/drawing/2014/main" id="{9ADF6F5A-CEBC-4BBA-AC1D-5414221D3397}"/>
+                <a16:creationId xmlns:a16="http://schemas.microsoft.com/office/drawing/2014/main" id="{2D9BDE1D-1DCC-413D-B53D-A37642BDF8E5}"/>
               </a:ext>
             </a:extLst>
           </p:cNvPr>
@@ -14731,7 +14731,7 @@
           <p:cNvPr id="10" name="bullet-2">
             <a:extLst xmlns:a="http://schemas.openxmlformats.org/drawingml/2006/main">
               <a:ext uri="{FF2B5EF4-FFF2-40B4-BE49-F238E27FC236}">
-                <a16:creationId xmlns:a16="http://schemas.microsoft.com/office/drawing/2014/main" id="{D24C4989-446F-4775-98F8-48B24D5AD774}"/>
+                <a16:creationId xmlns:a16="http://schemas.microsoft.com/office/drawing/2014/main" id="{2A06F649-EAB5-4F45-B570-BFC4942BDC7E}"/>
               </a:ext>
             </a:extLst>
           </p:cNvPr>
@@ -14793,7 +14793,7 @@
           <p:cNvPr id="11" name="bullet-mark-3">
             <a:extLst xmlns:a="http://schemas.openxmlformats.org/drawingml/2006/main">
               <a:ext uri="{FF2B5EF4-FFF2-40B4-BE49-F238E27FC236}">
-                <a16:creationId xmlns:a16="http://schemas.microsoft.com/office/drawing/2014/main" id="{3FD4E5C0-EB22-4CA5-B25D-A5905A754EFA}"/>
+                <a16:creationId xmlns:a16="http://schemas.microsoft.com/office/drawing/2014/main" id="{6232699C-B7A8-4ECF-BB7F-6979349750FE}"/>
               </a:ext>
             </a:extLst>
           </p:cNvPr>
@@ -14855,7 +14855,7 @@
           <p:cNvPr id="12" name="bullet-3">
             <a:extLst xmlns:a="http://schemas.openxmlformats.org/drawingml/2006/main">
               <a:ext uri="{FF2B5EF4-FFF2-40B4-BE49-F238E27FC236}">
-                <a16:creationId xmlns:a16="http://schemas.microsoft.com/office/drawing/2014/main" id="{2EDAE3E7-2758-402F-9DF6-1E39A7D86C76}"/>
+                <a16:creationId xmlns:a16="http://schemas.microsoft.com/office/drawing/2014/main" id="{325FE5F4-47F2-432D-ACF3-1F46BC2EAC2C}"/>
               </a:ext>
             </a:extLst>
           </p:cNvPr>
@@ -14917,7 +14917,7 @@
           <p:cNvPr id="13" name="bullet-mark-4">
             <a:extLst xmlns:a="http://schemas.openxmlformats.org/drawingml/2006/main">
               <a:ext uri="{FF2B5EF4-FFF2-40B4-BE49-F238E27FC236}">
-                <a16:creationId xmlns:a16="http://schemas.microsoft.com/office/drawing/2014/main" id="{90A8117D-CFEB-4B6E-8EF5-67FF011C8D72}"/>
+                <a16:creationId xmlns:a16="http://schemas.microsoft.com/office/drawing/2014/main" id="{BF4E18D1-9156-4F45-9B8D-6726C14BE5F8}"/>
               </a:ext>
             </a:extLst>
           </p:cNvPr>
@@ -14979,7 +14979,7 @@
           <p:cNvPr id="14" name="bullet-4">
             <a:extLst xmlns:a="http://schemas.openxmlformats.org/drawingml/2006/main">
               <a:ext uri="{FF2B5EF4-FFF2-40B4-BE49-F238E27FC236}">
-                <a16:creationId xmlns:a16="http://schemas.microsoft.com/office/drawing/2014/main" id="{FFBDB39A-8339-4410-9672-F0C097AEB726}"/>
+                <a16:creationId xmlns:a16="http://schemas.microsoft.com/office/drawing/2014/main" id="{C9C3C8C5-0CFE-426A-8CD5-0CEB9ACD6727}"/>
               </a:ext>
             </a:extLst>
           </p:cNvPr>
@@ -15041,7 +15041,7 @@
           <p:cNvPr id="15" name="bullet-mark-5">
             <a:extLst xmlns:a="http://schemas.openxmlformats.org/drawingml/2006/main">
               <a:ext uri="{FF2B5EF4-FFF2-40B4-BE49-F238E27FC236}">
-                <a16:creationId xmlns:a16="http://schemas.microsoft.com/office/drawing/2014/main" id="{7AD1B3A3-61B0-43AD-86AD-BA5B012C382A}"/>
+                <a16:creationId xmlns:a16="http://schemas.microsoft.com/office/drawing/2014/main" id="{1C30C8AF-C7CA-4AB6-A21C-C333B772223D}"/>
               </a:ext>
             </a:extLst>
           </p:cNvPr>
@@ -15103,7 +15103,7 @@
           <p:cNvPr id="16" name="bullet-5">
             <a:extLst xmlns:a="http://schemas.openxmlformats.org/drawingml/2006/main">
               <a:ext uri="{FF2B5EF4-FFF2-40B4-BE49-F238E27FC236}">
-                <a16:creationId xmlns:a16="http://schemas.microsoft.com/office/drawing/2014/main" id="{7F6C763F-AECD-483A-8CB9-6D1F65AA76D2}"/>
+                <a16:creationId xmlns:a16="http://schemas.microsoft.com/office/drawing/2014/main" id="{903A9DDA-12C1-4F32-AC10-06779EFCC290}"/>
               </a:ext>
             </a:extLst>
           </p:cNvPr>
@@ -15165,7 +15165,7 @@
           <p:cNvPr id="17" name="">
             <a:extLst xmlns:a="http://schemas.openxmlformats.org/drawingml/2006/main">
               <a:ext uri="{FF2B5EF4-FFF2-40B4-BE49-F238E27FC236}">
-                <a16:creationId xmlns:a16="http://schemas.microsoft.com/office/drawing/2014/main" id="{0BC237D9-2909-4531-9DE8-54716BDCF1D4}"/>
+                <a16:creationId xmlns:a16="http://schemas.microsoft.com/office/drawing/2014/main" id="{7827E5CA-FF8D-4299-91F3-BFBE128F8ACE}"/>
               </a:ext>
             </a:extLst>
           </p:cNvPr>
@@ -15225,7 +15225,7 @@
     </p:spTree>
     <p:extLst>
       <p:ext uri="{BB962C8B-B14F-4D97-AF65-F5344CB8AC3E}">
-        <p14:creationId xmlns:p14="http://schemas.microsoft.com/office/powerpoint/2010/main" val="1524224242"/>
+        <p14:creationId xmlns:p14="http://schemas.microsoft.com/office/powerpoint/2010/main" val="1882350560"/>
       </p:ext>
     </p:extLst>
   </p:cSld>
@@ -15256,7 +15256,7 @@
           <p:cNvPr id="8" name="chapter-label">
             <a:extLst xmlns:a="http://schemas.openxmlformats.org/drawingml/2006/main">
               <a:ext uri="{FF2B5EF4-FFF2-40B4-BE49-F238E27FC236}">
-                <a16:creationId xmlns:a16="http://schemas.microsoft.com/office/drawing/2014/main" id="{9E779BEE-CCC7-4635-8A58-C1CDFCEFCBF5}"/>
+                <a16:creationId xmlns:a16="http://schemas.microsoft.com/office/drawing/2014/main" id="{932A1036-D24D-48CB-880B-0EDF3DF33170}"/>
               </a:ext>
             </a:extLst>
           </p:cNvPr>
@@ -15318,7 +15318,7 @@
           <p:cNvPr id="2" name="slide-title">
             <a:extLst xmlns:a="http://schemas.openxmlformats.org/drawingml/2006/main">
               <a:ext uri="{FF2B5EF4-FFF2-40B4-BE49-F238E27FC236}">
-                <a16:creationId xmlns:a16="http://schemas.microsoft.com/office/drawing/2014/main" id="{4A19F227-B847-4D14-BC0E-AE23F4E1A1CE}"/>
+                <a16:creationId xmlns:a16="http://schemas.microsoft.com/office/drawing/2014/main" id="{FBEF8F38-4009-4758-B39F-E49D56546082}"/>
               </a:ext>
             </a:extLst>
           </p:cNvPr>
@@ -15380,7 +15380,7 @@
           <p:cNvPr id="3" name="footer-rule">
             <a:extLst xmlns:a="http://schemas.openxmlformats.org/drawingml/2006/main">
               <a:ext uri="{FF2B5EF4-FFF2-40B4-BE49-F238E27FC236}">
-                <a16:creationId xmlns:a16="http://schemas.microsoft.com/office/drawing/2014/main" id="{E54716E3-3F98-4688-998A-C52B79C4984D}"/>
+                <a16:creationId xmlns:a16="http://schemas.microsoft.com/office/drawing/2014/main" id="{73D737EE-EB66-4587-87A7-FED7E5DBD1CF}"/>
               </a:ext>
             </a:extLst>
           </p:cNvPr>
@@ -15411,7 +15411,7 @@
           <p:cNvPr id="4" name="footer-book">
             <a:extLst xmlns:a="http://schemas.openxmlformats.org/drawingml/2006/main">
               <a:ext uri="{FF2B5EF4-FFF2-40B4-BE49-F238E27FC236}">
-                <a16:creationId xmlns:a16="http://schemas.microsoft.com/office/drawing/2014/main" id="{649A2A40-5B6B-4103-AEAD-97BF5AA1CEC3}"/>
+                <a16:creationId xmlns:a16="http://schemas.microsoft.com/office/drawing/2014/main" id="{BBC99185-C73C-4753-A351-AA5E2452B86A}"/>
               </a:ext>
             </a:extLst>
           </p:cNvPr>
@@ -15473,7 +15473,7 @@
           <p:cNvPr id="5" name="footer-number">
             <a:extLst xmlns:a="http://schemas.openxmlformats.org/drawingml/2006/main">
               <a:ext uri="{FF2B5EF4-FFF2-40B4-BE49-F238E27FC236}">
-                <a16:creationId xmlns:a16="http://schemas.microsoft.com/office/drawing/2014/main" id="{A83D2082-E1AC-46C6-9892-C5CEF32788BE}"/>
+                <a16:creationId xmlns:a16="http://schemas.microsoft.com/office/drawing/2014/main" id="{21DAB03C-B4D5-42C8-AE47-C523E5D7EF0D}"/>
               </a:ext>
             </a:extLst>
           </p:cNvPr>
@@ -15539,7 +15539,7 @@
           <p:nvPr/>
         </p:nvPicPr>
         <p:blipFill>
-          <a:blip xmlns:r="http://schemas.openxmlformats.org/officeDocument/2006/relationships" xmlns:a="http://schemas.openxmlformats.org/drawingml/2006/main" r:embed="R31c6881d646c4fd0"/>
+          <a:blip xmlns:r="http://schemas.openxmlformats.org/officeDocument/2006/relationships" xmlns:a="http://schemas.openxmlformats.org/drawingml/2006/main" r:embed="R907a3ebaedc64d31"/>
           <a:stretch xmlns:a="http://schemas.openxmlformats.org/drawingml/2006/main"/>
         </p:blipFill>
         <p:spPr>
@@ -15557,7 +15557,7 @@
           <p:cNvPr id="7" name="">
             <a:extLst xmlns:a="http://schemas.openxmlformats.org/drawingml/2006/main">
               <a:ext uri="{FF2B5EF4-FFF2-40B4-BE49-F238E27FC236}">
-                <a16:creationId xmlns:a16="http://schemas.microsoft.com/office/drawing/2014/main" id="{2BC6C513-04C0-4BEE-AE0F-5DF3519E761A}"/>
+                <a16:creationId xmlns:a16="http://schemas.microsoft.com/office/drawing/2014/main" id="{FE9C561F-ABFB-448B-B211-87A2815C3EB6}"/>
               </a:ext>
             </a:extLst>
           </p:cNvPr>
@@ -15617,7 +15617,7 @@
     </p:spTree>
     <p:extLst>
       <p:ext uri="{BB962C8B-B14F-4D97-AF65-F5344CB8AC3E}">
-        <p14:creationId xmlns:p14="http://schemas.microsoft.com/office/powerpoint/2010/main" val="1803116789"/>
+        <p14:creationId xmlns:p14="http://schemas.microsoft.com/office/powerpoint/2010/main" val="555681731"/>
       </p:ext>
     </p:extLst>
   </p:cSld>
@@ -15648,7 +15648,7 @@
           <p:cNvPr id="8" name="chapter-label">
             <a:extLst xmlns:a="http://schemas.openxmlformats.org/drawingml/2006/main">
               <a:ext uri="{FF2B5EF4-FFF2-40B4-BE49-F238E27FC236}">
-                <a16:creationId xmlns:a16="http://schemas.microsoft.com/office/drawing/2014/main" id="{9BAB8151-CF64-4068-BAA4-D4463DF02D66}"/>
+                <a16:creationId xmlns:a16="http://schemas.microsoft.com/office/drawing/2014/main" id="{08C20F85-B660-45D6-A4AB-D9BF864DE834}"/>
               </a:ext>
             </a:extLst>
           </p:cNvPr>
@@ -15710,7 +15710,7 @@
           <p:cNvPr id="2" name="slide-title">
             <a:extLst xmlns:a="http://schemas.openxmlformats.org/drawingml/2006/main">
               <a:ext uri="{FF2B5EF4-FFF2-40B4-BE49-F238E27FC236}">
-                <a16:creationId xmlns:a16="http://schemas.microsoft.com/office/drawing/2014/main" id="{CD654667-174D-483A-A340-03DCE15ABB1B}"/>
+                <a16:creationId xmlns:a16="http://schemas.microsoft.com/office/drawing/2014/main" id="{D69A2034-DD57-4819-8620-42AC065B2387}"/>
               </a:ext>
             </a:extLst>
           </p:cNvPr>
@@ -15772,7 +15772,7 @@
           <p:cNvPr id="3" name="footer-rule">
             <a:extLst xmlns:a="http://schemas.openxmlformats.org/drawingml/2006/main">
               <a:ext uri="{FF2B5EF4-FFF2-40B4-BE49-F238E27FC236}">
-                <a16:creationId xmlns:a16="http://schemas.microsoft.com/office/drawing/2014/main" id="{4B29FD5D-0DB0-4648-992C-EF267A3C49F7}"/>
+                <a16:creationId xmlns:a16="http://schemas.microsoft.com/office/drawing/2014/main" id="{9E72AF3C-75B5-4160-B7EF-0C12B8DC5DA1}"/>
               </a:ext>
             </a:extLst>
           </p:cNvPr>
@@ -15803,7 +15803,7 @@
           <p:cNvPr id="4" name="footer-book">
             <a:extLst xmlns:a="http://schemas.openxmlformats.org/drawingml/2006/main">
               <a:ext uri="{FF2B5EF4-FFF2-40B4-BE49-F238E27FC236}">
-                <a16:creationId xmlns:a16="http://schemas.microsoft.com/office/drawing/2014/main" id="{F933DD5D-EF9E-417E-A40A-74D0B8DD89DF}"/>
+                <a16:creationId xmlns:a16="http://schemas.microsoft.com/office/drawing/2014/main" id="{DE48CBD0-C631-43CC-B480-269CEDA27B56}"/>
               </a:ext>
             </a:extLst>
           </p:cNvPr>
@@ -15865,7 +15865,7 @@
           <p:cNvPr id="5" name="footer-number">
             <a:extLst xmlns:a="http://schemas.openxmlformats.org/drawingml/2006/main">
               <a:ext uri="{FF2B5EF4-FFF2-40B4-BE49-F238E27FC236}">
-                <a16:creationId xmlns:a16="http://schemas.microsoft.com/office/drawing/2014/main" id="{38A72ABA-6C98-4FE4-9D6C-F5E62AC9DC1D}"/>
+                <a16:creationId xmlns:a16="http://schemas.microsoft.com/office/drawing/2014/main" id="{82BABD51-5A0B-47D8-A4E5-0FD20D05D820}"/>
               </a:ext>
             </a:extLst>
           </p:cNvPr>
@@ -15931,7 +15931,7 @@
           <p:nvPr/>
         </p:nvPicPr>
         <p:blipFill>
-          <a:blip xmlns:r="http://schemas.openxmlformats.org/officeDocument/2006/relationships" xmlns:a="http://schemas.openxmlformats.org/drawingml/2006/main" r:embed="R7bf14c8ba5564942"/>
+          <a:blip xmlns:r="http://schemas.openxmlformats.org/officeDocument/2006/relationships" xmlns:a="http://schemas.openxmlformats.org/drawingml/2006/main" r:embed="R491ca0c6c4c24420"/>
           <a:stretch xmlns:a="http://schemas.openxmlformats.org/drawingml/2006/main"/>
         </p:blipFill>
         <p:spPr>
@@ -15949,7 +15949,7 @@
           <p:cNvPr id="7" name="">
             <a:extLst xmlns:a="http://schemas.openxmlformats.org/drawingml/2006/main">
               <a:ext uri="{FF2B5EF4-FFF2-40B4-BE49-F238E27FC236}">
-                <a16:creationId xmlns:a16="http://schemas.microsoft.com/office/drawing/2014/main" id="{85F10E2F-F73E-4F5B-83AA-022A18170F6E}"/>
+                <a16:creationId xmlns:a16="http://schemas.microsoft.com/office/drawing/2014/main" id="{6D25B729-27FE-4059-A12D-730F357B08AE}"/>
               </a:ext>
             </a:extLst>
           </p:cNvPr>
@@ -16009,7 +16009,7 @@
     </p:spTree>
     <p:extLst>
       <p:ext uri="{BB962C8B-B14F-4D97-AF65-F5344CB8AC3E}">
-        <p14:creationId xmlns:p14="http://schemas.microsoft.com/office/powerpoint/2010/main" val="1210935026"/>
+        <p14:creationId xmlns:p14="http://schemas.microsoft.com/office/powerpoint/2010/main" val="1611320417"/>
       </p:ext>
     </p:extLst>
   </p:cSld>
